--- a/koreatech-db/weeks/04주차_DML_기초와_트랜잭션.pptx
+++ b/koreatech-db/weeks/04주차_DML_기초와_트랜잭션.pptx
@@ -4040,9 +4040,9 @@
                 <a:solidFill>
                   <a:srgbClr val="7A869C"/>
                 </a:solidFill>
-                <a:latin typeface="나눔고딕코딩"/>
-                <a:ea typeface="나눔고딕코딩"/>
-                <a:cs typeface="나눔고딕코딩"/>
+                <a:latin typeface="D2Coding"/>
+                <a:ea typeface="D2Coding"/>
+                <a:cs typeface="D2Coding"/>
               </a:rPr>
               <a:t>1</a:t>
             </a:r>
@@ -4058,9 +4058,9 @@
                 <a:solidFill>
                   <a:srgbClr val="7A869C"/>
                 </a:solidFill>
-                <a:latin typeface="나눔고딕코딩"/>
-                <a:ea typeface="나눔고딕코딩"/>
-                <a:cs typeface="나눔고딕코딩"/>
+                <a:latin typeface="D2Coding"/>
+                <a:ea typeface="D2Coding"/>
+                <a:cs typeface="D2Coding"/>
               </a:rPr>
               <a:t>2</a:t>
             </a:r>
@@ -4076,9 +4076,9 @@
                 <a:solidFill>
                   <a:srgbClr val="7A869C"/>
                 </a:solidFill>
-                <a:latin typeface="나눔고딕코딩"/>
-                <a:ea typeface="나눔고딕코딩"/>
-                <a:cs typeface="나눔고딕코딩"/>
+                <a:latin typeface="D2Coding"/>
+                <a:ea typeface="D2Coding"/>
+                <a:cs typeface="D2Coding"/>
               </a:rPr>
               <a:t>3</a:t>
             </a:r>
@@ -4094,9 +4094,9 @@
                 <a:solidFill>
                   <a:srgbClr val="7A869C"/>
                 </a:solidFill>
-                <a:latin typeface="나눔고딕코딩"/>
-                <a:ea typeface="나눔고딕코딩"/>
-                <a:cs typeface="나눔고딕코딩"/>
+                <a:latin typeface="D2Coding"/>
+                <a:ea typeface="D2Coding"/>
+                <a:cs typeface="D2Coding"/>
               </a:rPr>
               <a:t>4</a:t>
             </a:r>
@@ -4112,9 +4112,9 @@
                 <a:solidFill>
                   <a:srgbClr val="7A869C"/>
                 </a:solidFill>
-                <a:latin typeface="나눔고딕코딩"/>
-                <a:ea typeface="나눔고딕코딩"/>
-                <a:cs typeface="나눔고딕코딩"/>
+                <a:latin typeface="D2Coding"/>
+                <a:ea typeface="D2Coding"/>
+                <a:cs typeface="D2Coding"/>
               </a:rPr>
               <a:t>5</a:t>
             </a:r>
@@ -4130,9 +4130,9 @@
                 <a:solidFill>
                   <a:srgbClr val="7A869C"/>
                 </a:solidFill>
-                <a:latin typeface="나눔고딕코딩"/>
-                <a:ea typeface="나눔고딕코딩"/>
-                <a:cs typeface="나눔고딕코딩"/>
+                <a:latin typeface="D2Coding"/>
+                <a:ea typeface="D2Coding"/>
+                <a:cs typeface="D2Coding"/>
               </a:rPr>
               <a:t>6</a:t>
             </a:r>
@@ -4148,9 +4148,9 @@
                 <a:solidFill>
                   <a:srgbClr val="7A869C"/>
                 </a:solidFill>
-                <a:latin typeface="나눔고딕코딩"/>
-                <a:ea typeface="나눔고딕코딩"/>
-                <a:cs typeface="나눔고딕코딩"/>
+                <a:latin typeface="D2Coding"/>
+                <a:ea typeface="D2Coding"/>
+                <a:cs typeface="D2Coding"/>
               </a:rPr>
               <a:t>7</a:t>
             </a:r>
@@ -4166,9 +4166,9 @@
                 <a:solidFill>
                   <a:srgbClr val="7A869C"/>
                 </a:solidFill>
-                <a:latin typeface="나눔고딕코딩"/>
-                <a:ea typeface="나눔고딕코딩"/>
-                <a:cs typeface="나눔고딕코딩"/>
+                <a:latin typeface="D2Coding"/>
+                <a:ea typeface="D2Coding"/>
+                <a:cs typeface="D2Coding"/>
               </a:rPr>
               <a:t>8</a:t>
             </a:r>
@@ -4184,9 +4184,9 @@
                 <a:solidFill>
                   <a:srgbClr val="7A869C"/>
                 </a:solidFill>
-                <a:latin typeface="나눔고딕코딩"/>
-                <a:ea typeface="나눔고딕코딩"/>
-                <a:cs typeface="나눔고딕코딩"/>
+                <a:latin typeface="D2Coding"/>
+                <a:ea typeface="D2Coding"/>
+                <a:cs typeface="D2Coding"/>
               </a:rPr>
               <a:t>9</a:t>
             </a:r>
@@ -4202,9 +4202,9 @@
                 <a:solidFill>
                   <a:srgbClr val="7A869C"/>
                 </a:solidFill>
-                <a:latin typeface="나눔고딕코딩"/>
-                <a:ea typeface="나눔고딕코딩"/>
-                <a:cs typeface="나눔고딕코딩"/>
+                <a:latin typeface="D2Coding"/>
+                <a:ea typeface="D2Coding"/>
+                <a:cs typeface="D2Coding"/>
               </a:rPr>
               <a:t>10</a:t>
             </a:r>
@@ -4220,9 +4220,9 @@
                 <a:solidFill>
                   <a:srgbClr val="7A869C"/>
                 </a:solidFill>
-                <a:latin typeface="나눔고딕코딩"/>
-                <a:ea typeface="나눔고딕코딩"/>
-                <a:cs typeface="나눔고딕코딩"/>
+                <a:latin typeface="D2Coding"/>
+                <a:ea typeface="D2Coding"/>
+                <a:cs typeface="D2Coding"/>
               </a:rPr>
               <a:t>11</a:t>
             </a:r>
@@ -4238,9 +4238,9 @@
                 <a:solidFill>
                   <a:srgbClr val="7A869C"/>
                 </a:solidFill>
-                <a:latin typeface="나눔고딕코딩"/>
-                <a:ea typeface="나눔고딕코딩"/>
-                <a:cs typeface="나눔고딕코딩"/>
+                <a:latin typeface="D2Coding"/>
+                <a:ea typeface="D2Coding"/>
+                <a:cs typeface="D2Coding"/>
               </a:rPr>
               <a:t>12</a:t>
             </a:r>
@@ -4279,9 +4279,9 @@
                 <a:solidFill>
                   <a:srgbClr val="E6EAF2"/>
                 </a:solidFill>
-                <a:latin typeface="나눔고딕코딩"/>
-                <a:ea typeface="나눔고딕코딩"/>
-                <a:cs typeface="나눔고딕코딩"/>
+                <a:latin typeface="D2Coding"/>
+                <a:ea typeface="D2Coding"/>
+                <a:cs typeface="D2Coding"/>
               </a:rPr>
               <a:t>-- 값 순서: prod_id, name, category, price(원), stock(재고 수량)</a:t>
             </a:r>
@@ -4297,9 +4297,9 @@
                 <a:solidFill>
                   <a:srgbClr val="E6EAF2"/>
                 </a:solidFill>
-                <a:latin typeface="나눔고딕코딩"/>
-                <a:ea typeface="나눔고딕코딩"/>
-                <a:cs typeface="나눔고딕코딩"/>
+                <a:latin typeface="D2Coding"/>
+                <a:ea typeface="D2Coding"/>
+                <a:cs typeface="D2Coding"/>
               </a:rPr>
               <a:t>INSERT INTO products VALUES</a:t>
             </a:r>
@@ -4315,9 +4315,9 @@
                 <a:solidFill>
                   <a:srgbClr val="E6EAF2"/>
                 </a:solidFill>
-                <a:latin typeface="나눔고딕코딩"/>
-                <a:ea typeface="나눔고딕코딩"/>
-                <a:cs typeface="나눔고딕코딩"/>
+                <a:latin typeface="D2Coding"/>
+                <a:ea typeface="D2Coding"/>
+                <a:cs typeface="D2Coding"/>
               </a:rPr>
               <a:t> ('P001','무선 전기포트','가전',42000,25),</a:t>
             </a:r>
@@ -4333,9 +4333,9 @@
                 <a:solidFill>
                   <a:srgbClr val="E6EAF2"/>
                 </a:solidFill>
-                <a:latin typeface="나눔고딕코딩"/>
-                <a:ea typeface="나눔고딕코딩"/>
-                <a:cs typeface="나눔고딕코딩"/>
+                <a:latin typeface="D2Coding"/>
+                <a:ea typeface="D2Coding"/>
+                <a:cs typeface="D2Coding"/>
               </a:rPr>
               <a:t> ('P002','공기청정기','가전',189000,8),</a:t>
             </a:r>
@@ -4351,9 +4351,9 @@
                 <a:solidFill>
                   <a:srgbClr val="E6EAF2"/>
                 </a:solidFill>
-                <a:latin typeface="나눔고딕코딩"/>
-                <a:ea typeface="나눔고딕코딩"/>
-                <a:cs typeface="나눔고딕코딩"/>
+                <a:latin typeface="D2Coding"/>
+                <a:ea typeface="D2Coding"/>
+                <a:cs typeface="D2Coding"/>
               </a:rPr>
               <a:t> ('P003','유기농 원두 500g','식품',18500,60),</a:t>
             </a:r>
@@ -4369,9 +4369,9 @@
                 <a:solidFill>
                   <a:srgbClr val="E6EAF2"/>
                 </a:solidFill>
-                <a:latin typeface="나눔고딕코딩"/>
-                <a:ea typeface="나눔고딕코딩"/>
-                <a:cs typeface="나눔고딕코딩"/>
+                <a:latin typeface="D2Coding"/>
+                <a:ea typeface="D2Coding"/>
+                <a:cs typeface="D2Coding"/>
               </a:rPr>
               <a:t> ('P004','제주 감귤 3kg','식품',24000,0),</a:t>
             </a:r>
@@ -4387,9 +4387,9 @@
                 <a:solidFill>
                   <a:srgbClr val="E6EAF2"/>
                 </a:solidFill>
-                <a:latin typeface="나눔고딕코딩"/>
-                <a:ea typeface="나눔고딕코딩"/>
-                <a:cs typeface="나눔고딕코딩"/>
+                <a:latin typeface="D2Coding"/>
+                <a:ea typeface="D2Coding"/>
+                <a:cs typeface="D2Coding"/>
               </a:rPr>
               <a:t> ('P005','곡물 시리얼 세트','식품',15800,42),</a:t>
             </a:r>
@@ -4405,9 +4405,9 @@
                 <a:solidFill>
                   <a:srgbClr val="E6EAF2"/>
                 </a:solidFill>
-                <a:latin typeface="나눔고딕코딩"/>
-                <a:ea typeface="나눔고딕코딩"/>
-                <a:cs typeface="나눔고딕코딩"/>
+                <a:latin typeface="D2Coding"/>
+                <a:ea typeface="D2Coding"/>
+                <a:cs typeface="D2Coding"/>
               </a:rPr>
               <a:t> ('P006','대나무 칫솔 4입','생활용품',6900,120),</a:t>
             </a:r>
@@ -4423,9 +4423,9 @@
                 <a:solidFill>
                   <a:srgbClr val="E6EAF2"/>
                 </a:solidFill>
-                <a:latin typeface="나눔고딕코딩"/>
-                <a:ea typeface="나눔고딕코딩"/>
-                <a:cs typeface="나눔고딕코딩"/>
+                <a:latin typeface="D2Coding"/>
+                <a:ea typeface="D2Coding"/>
+                <a:cs typeface="D2Coding"/>
               </a:rPr>
               <a:t> ('P007','천연 세탁세제','생활용품',12500,75),</a:t>
             </a:r>
@@ -4441,9 +4441,9 @@
                 <a:solidFill>
                   <a:srgbClr val="E6EAF2"/>
                 </a:solidFill>
-                <a:latin typeface="나눔고딕코딩"/>
-                <a:ea typeface="나눔고딕코딩"/>
-                <a:cs typeface="나눔고딕코딩"/>
+                <a:latin typeface="D2Coding"/>
+                <a:ea typeface="D2Coding"/>
+                <a:cs typeface="D2Coding"/>
               </a:rPr>
               <a:t> ('P008','접이식 장바구니','생활용품',9800,50),</a:t>
             </a:r>
@@ -4459,9 +4459,9 @@
                 <a:solidFill>
                   <a:srgbClr val="E6EAF2"/>
                 </a:solidFill>
-                <a:latin typeface="나눔고딕코딩"/>
-                <a:ea typeface="나눔고딕코딩"/>
-                <a:cs typeface="나눔고딕코딩"/>
+                <a:latin typeface="D2Coding"/>
+                <a:ea typeface="D2Coding"/>
+                <a:cs typeface="D2Coding"/>
               </a:rPr>
               <a:t> ('P009','3색 볼펜 세트','문구',4500,200),</a:t>
             </a:r>
@@ -4477,9 +4477,9 @@
                 <a:solidFill>
                   <a:srgbClr val="E6EAF2"/>
                 </a:solidFill>
-                <a:latin typeface="나눔고딕코딩"/>
-                <a:ea typeface="나눔고딕코딩"/>
-                <a:cs typeface="나눔고딕코딩"/>
+                <a:latin typeface="D2Coding"/>
+                <a:ea typeface="D2Coding"/>
+                <a:cs typeface="D2Coding"/>
               </a:rPr>
               <a:t> ('P010','A5 스프링 노트','문구',3200,180);</a:t>
             </a:r>
@@ -5086,9 +5086,9 @@
                 <a:solidFill>
                   <a:srgbClr val="7A869C"/>
                 </a:solidFill>
-                <a:latin typeface="나눔고딕코딩"/>
-                <a:ea typeface="나눔고딕코딩"/>
-                <a:cs typeface="나눔고딕코딩"/>
+                <a:latin typeface="D2Coding"/>
+                <a:ea typeface="D2Coding"/>
+                <a:cs typeface="D2Coding"/>
               </a:rPr>
               <a:t>1</a:t>
             </a:r>
@@ -5104,9 +5104,9 @@
                 <a:solidFill>
                   <a:srgbClr val="7A869C"/>
                 </a:solidFill>
-                <a:latin typeface="나눔고딕코딩"/>
-                <a:ea typeface="나눔고딕코딩"/>
-                <a:cs typeface="나눔고딕코딩"/>
+                <a:latin typeface="D2Coding"/>
+                <a:ea typeface="D2Coding"/>
+                <a:cs typeface="D2Coding"/>
               </a:rPr>
               <a:t>2</a:t>
             </a:r>
@@ -5122,9 +5122,9 @@
                 <a:solidFill>
                   <a:srgbClr val="7A869C"/>
                 </a:solidFill>
-                <a:latin typeface="나눔고딕코딩"/>
-                <a:ea typeface="나눔고딕코딩"/>
-                <a:cs typeface="나눔고딕코딩"/>
+                <a:latin typeface="D2Coding"/>
+                <a:ea typeface="D2Coding"/>
+                <a:cs typeface="D2Coding"/>
               </a:rPr>
               <a:t>3</a:t>
             </a:r>
@@ -5140,9 +5140,9 @@
                 <a:solidFill>
                   <a:srgbClr val="7A869C"/>
                 </a:solidFill>
-                <a:latin typeface="나눔고딕코딩"/>
-                <a:ea typeface="나눔고딕코딩"/>
-                <a:cs typeface="나눔고딕코딩"/>
+                <a:latin typeface="D2Coding"/>
+                <a:ea typeface="D2Coding"/>
+                <a:cs typeface="D2Coding"/>
               </a:rPr>
               <a:t>4</a:t>
             </a:r>
@@ -5158,9 +5158,9 @@
                 <a:solidFill>
                   <a:srgbClr val="7A869C"/>
                 </a:solidFill>
-                <a:latin typeface="나눔고딕코딩"/>
-                <a:ea typeface="나눔고딕코딩"/>
-                <a:cs typeface="나눔고딕코딩"/>
+                <a:latin typeface="D2Coding"/>
+                <a:ea typeface="D2Coding"/>
+                <a:cs typeface="D2Coding"/>
               </a:rPr>
               <a:t>5</a:t>
             </a:r>
@@ -5176,9 +5176,9 @@
                 <a:solidFill>
                   <a:srgbClr val="7A869C"/>
                 </a:solidFill>
-                <a:latin typeface="나눔고딕코딩"/>
-                <a:ea typeface="나눔고딕코딩"/>
-                <a:cs typeface="나눔고딕코딩"/>
+                <a:latin typeface="D2Coding"/>
+                <a:ea typeface="D2Coding"/>
+                <a:cs typeface="D2Coding"/>
               </a:rPr>
               <a:t>6</a:t>
             </a:r>
@@ -5194,9 +5194,9 @@
                 <a:solidFill>
                   <a:srgbClr val="7A869C"/>
                 </a:solidFill>
-                <a:latin typeface="나눔고딕코딩"/>
-                <a:ea typeface="나눔고딕코딩"/>
-                <a:cs typeface="나눔고딕코딩"/>
+                <a:latin typeface="D2Coding"/>
+                <a:ea typeface="D2Coding"/>
+                <a:cs typeface="D2Coding"/>
               </a:rPr>
               <a:t>7</a:t>
             </a:r>
@@ -5212,9 +5212,9 @@
                 <a:solidFill>
                   <a:srgbClr val="7A869C"/>
                 </a:solidFill>
-                <a:latin typeface="나눔고딕코딩"/>
-                <a:ea typeface="나눔고딕코딩"/>
-                <a:cs typeface="나눔고딕코딩"/>
+                <a:latin typeface="D2Coding"/>
+                <a:ea typeface="D2Coding"/>
+                <a:cs typeface="D2Coding"/>
               </a:rPr>
               <a:t>8</a:t>
             </a:r>
@@ -5230,9 +5230,9 @@
                 <a:solidFill>
                   <a:srgbClr val="7A869C"/>
                 </a:solidFill>
-                <a:latin typeface="나눔고딕코딩"/>
-                <a:ea typeface="나눔고딕코딩"/>
-                <a:cs typeface="나눔고딕코딩"/>
+                <a:latin typeface="D2Coding"/>
+                <a:ea typeface="D2Coding"/>
+                <a:cs typeface="D2Coding"/>
               </a:rPr>
               <a:t>9</a:t>
             </a:r>
@@ -5248,9 +5248,9 @@
                 <a:solidFill>
                   <a:srgbClr val="7A869C"/>
                 </a:solidFill>
-                <a:latin typeface="나눔고딕코딩"/>
-                <a:ea typeface="나눔고딕코딩"/>
-                <a:cs typeface="나눔고딕코딩"/>
+                <a:latin typeface="D2Coding"/>
+                <a:ea typeface="D2Coding"/>
+                <a:cs typeface="D2Coding"/>
               </a:rPr>
               <a:t>10</a:t>
             </a:r>
@@ -5266,9 +5266,9 @@
                 <a:solidFill>
                   <a:srgbClr val="7A869C"/>
                 </a:solidFill>
-                <a:latin typeface="나눔고딕코딩"/>
-                <a:ea typeface="나눔고딕코딩"/>
-                <a:cs typeface="나눔고딕코딩"/>
+                <a:latin typeface="D2Coding"/>
+                <a:ea typeface="D2Coding"/>
+                <a:cs typeface="D2Coding"/>
               </a:rPr>
               <a:t>11</a:t>
             </a:r>
@@ -5284,9 +5284,9 @@
                 <a:solidFill>
                   <a:srgbClr val="7A869C"/>
                 </a:solidFill>
-                <a:latin typeface="나눔고딕코딩"/>
-                <a:ea typeface="나눔고딕코딩"/>
-                <a:cs typeface="나눔고딕코딩"/>
+                <a:latin typeface="D2Coding"/>
+                <a:ea typeface="D2Coding"/>
+                <a:cs typeface="D2Coding"/>
               </a:rPr>
               <a:t>12</a:t>
             </a:r>
@@ -5302,9 +5302,9 @@
                 <a:solidFill>
                   <a:srgbClr val="7A869C"/>
                 </a:solidFill>
-                <a:latin typeface="나눔고딕코딩"/>
-                <a:ea typeface="나눔고딕코딩"/>
-                <a:cs typeface="나눔고딕코딩"/>
+                <a:latin typeface="D2Coding"/>
+                <a:ea typeface="D2Coding"/>
+                <a:cs typeface="D2Coding"/>
               </a:rPr>
               <a:t>13</a:t>
             </a:r>
@@ -5320,9 +5320,9 @@
                 <a:solidFill>
                   <a:srgbClr val="7A869C"/>
                 </a:solidFill>
-                <a:latin typeface="나눔고딕코딩"/>
-                <a:ea typeface="나눔고딕코딩"/>
-                <a:cs typeface="나눔고딕코딩"/>
+                <a:latin typeface="D2Coding"/>
+                <a:ea typeface="D2Coding"/>
+                <a:cs typeface="D2Coding"/>
               </a:rPr>
               <a:t>14</a:t>
             </a:r>
@@ -5338,9 +5338,9 @@
                 <a:solidFill>
                   <a:srgbClr val="7A869C"/>
                 </a:solidFill>
-                <a:latin typeface="나눔고딕코딩"/>
-                <a:ea typeface="나눔고딕코딩"/>
-                <a:cs typeface="나눔고딕코딩"/>
+                <a:latin typeface="D2Coding"/>
+                <a:ea typeface="D2Coding"/>
+                <a:cs typeface="D2Coding"/>
               </a:rPr>
               <a:t>15</a:t>
             </a:r>
@@ -5356,9 +5356,9 @@
                 <a:solidFill>
                   <a:srgbClr val="7A869C"/>
                 </a:solidFill>
-                <a:latin typeface="나눔고딕코딩"/>
-                <a:ea typeface="나눔고딕코딩"/>
-                <a:cs typeface="나눔고딕코딩"/>
+                <a:latin typeface="D2Coding"/>
+                <a:ea typeface="D2Coding"/>
+                <a:cs typeface="D2Coding"/>
               </a:rPr>
               <a:t>16</a:t>
             </a:r>
@@ -5397,9 +5397,9 @@
                 <a:solidFill>
                   <a:srgbClr val="E6EAF2"/>
                 </a:solidFill>
-                <a:latin typeface="나눔고딕코딩"/>
-                <a:ea typeface="나눔고딕코딩"/>
-                <a:cs typeface="나눔고딕코딩"/>
+                <a:latin typeface="D2Coding"/>
+                <a:ea typeface="D2Coding"/>
+                <a:cs typeface="D2Coding"/>
               </a:rPr>
               <a:t>INSERT INTO orders (order_id, cust_id, emp_id, order_date, status) VALUES</a:t>
             </a:r>
@@ -5415,9 +5415,9 @@
                 <a:solidFill>
                   <a:srgbClr val="E6EAF2"/>
                 </a:solidFill>
-                <a:latin typeface="나눔고딕코딩"/>
-                <a:ea typeface="나눔고딕코딩"/>
-                <a:cs typeface="나눔고딕코딩"/>
+                <a:latin typeface="D2Coding"/>
+                <a:ea typeface="D2Coding"/>
+                <a:cs typeface="D2Coding"/>
               </a:rPr>
               <a:t> (1001,'C001','E002','2026-01-10','배송완료'),</a:t>
             </a:r>
@@ -5433,9 +5433,9 @@
                 <a:solidFill>
                   <a:srgbClr val="E6EAF2"/>
                 </a:solidFill>
-                <a:latin typeface="나눔고딕코딩"/>
-                <a:ea typeface="나눔고딕코딩"/>
-                <a:cs typeface="나눔고딕코딩"/>
+                <a:latin typeface="D2Coding"/>
+                <a:ea typeface="D2Coding"/>
+                <a:cs typeface="D2Coding"/>
               </a:rPr>
               <a:t> (1002,'C002',NULL,  '2026-01-22','배송완료'),</a:t>
             </a:r>
@@ -5451,9 +5451,9 @@
                 <a:solidFill>
                   <a:srgbClr val="E6EAF2"/>
                 </a:solidFill>
-                <a:latin typeface="나눔고딕코딩"/>
-                <a:ea typeface="나눔고딕코딩"/>
-                <a:cs typeface="나눔고딕코딩"/>
+                <a:latin typeface="D2Coding"/>
+                <a:ea typeface="D2Coding"/>
+                <a:cs typeface="D2Coding"/>
               </a:rPr>
               <a:t> (1003,'C004','E002','2026-02-03','배송완료'),</a:t>
             </a:r>
@@ -5469,9 +5469,9 @@
                 <a:solidFill>
                   <a:srgbClr val="E6EAF2"/>
                 </a:solidFill>
-                <a:latin typeface="나눔고딕코딩"/>
-                <a:ea typeface="나눔고딕코딩"/>
-                <a:cs typeface="나눔고딕코딩"/>
+                <a:latin typeface="D2Coding"/>
+                <a:ea typeface="D2Coding"/>
+                <a:cs typeface="D2Coding"/>
               </a:rPr>
               <a:t> (1004,'C001',NULL,  '2026-02-14','배송완료'),</a:t>
             </a:r>
@@ -5487,9 +5487,9 @@
                 <a:solidFill>
                   <a:srgbClr val="E6EAF2"/>
                 </a:solidFill>
-                <a:latin typeface="나눔고딕코딩"/>
-                <a:ea typeface="나눔고딕코딩"/>
-                <a:cs typeface="나눔고딕코딩"/>
+                <a:latin typeface="D2Coding"/>
+                <a:ea typeface="D2Coding"/>
+                <a:cs typeface="D2Coding"/>
               </a:rPr>
               <a:t> (1005,'C006','E003','2026-02-27','취소'),</a:t>
             </a:r>
@@ -5505,9 +5505,9 @@
                 <a:solidFill>
                   <a:srgbClr val="E6EAF2"/>
                 </a:solidFill>
-                <a:latin typeface="나눔고딕코딩"/>
-                <a:ea typeface="나눔고딕코딩"/>
-                <a:cs typeface="나눔고딕코딩"/>
+                <a:latin typeface="D2Coding"/>
+                <a:ea typeface="D2Coding"/>
+                <a:cs typeface="D2Coding"/>
               </a:rPr>
               <a:t> (1006,'C003',NULL,  '2026-03-05','배송완료'),</a:t>
             </a:r>
@@ -5523,9 +5523,9 @@
                 <a:solidFill>
                   <a:srgbClr val="E6EAF2"/>
                 </a:solidFill>
-                <a:latin typeface="나눔고딕코딩"/>
-                <a:ea typeface="나눔고딕코딩"/>
-                <a:cs typeface="나눔고딕코딩"/>
+                <a:latin typeface="D2Coding"/>
+                <a:ea typeface="D2Coding"/>
+                <a:cs typeface="D2Coding"/>
               </a:rPr>
               <a:t> (1007,'C009','E002','2026-03-18','배송완료'),</a:t>
             </a:r>
@@ -5541,9 +5541,9 @@
                 <a:solidFill>
                   <a:srgbClr val="E6EAF2"/>
                 </a:solidFill>
-                <a:latin typeface="나눔고딕코딩"/>
-                <a:ea typeface="나눔고딕코딩"/>
-                <a:cs typeface="나눔고딕코딩"/>
+                <a:latin typeface="D2Coding"/>
+                <a:ea typeface="D2Coding"/>
+                <a:cs typeface="D2Coding"/>
               </a:rPr>
               <a:t> (1008,'C004',NULL,  '2026-03-29','배송완료'),</a:t>
             </a:r>
@@ -5559,9 +5559,9 @@
                 <a:solidFill>
                   <a:srgbClr val="E6EAF2"/>
                 </a:solidFill>
-                <a:latin typeface="나눔고딕코딩"/>
-                <a:ea typeface="나눔고딕코딩"/>
-                <a:cs typeface="나눔고딕코딩"/>
+                <a:latin typeface="D2Coding"/>
+                <a:ea typeface="D2Coding"/>
+                <a:cs typeface="D2Coding"/>
               </a:rPr>
               <a:t> (1009,'C008','E003','2026-04-08','배송완료'),</a:t>
             </a:r>
@@ -5577,9 +5577,9 @@
                 <a:solidFill>
                   <a:srgbClr val="E6EAF2"/>
                 </a:solidFill>
-                <a:latin typeface="나눔고딕코딩"/>
-                <a:ea typeface="나눔고딕코딩"/>
-                <a:cs typeface="나눔고딕코딩"/>
+                <a:latin typeface="D2Coding"/>
+                <a:ea typeface="D2Coding"/>
+                <a:cs typeface="D2Coding"/>
               </a:rPr>
               <a:t> (1010,'C001',NULL,  '2026-04-21','배송완료'),</a:t>
             </a:r>
@@ -5595,9 +5595,9 @@
                 <a:solidFill>
                   <a:srgbClr val="E6EAF2"/>
                 </a:solidFill>
-                <a:latin typeface="나눔고딕코딩"/>
-                <a:ea typeface="나눔고딕코딩"/>
-                <a:cs typeface="나눔고딕코딩"/>
+                <a:latin typeface="D2Coding"/>
+                <a:ea typeface="D2Coding"/>
+                <a:cs typeface="D2Coding"/>
               </a:rPr>
               <a:t> (1011,'C006','E002','2026-05-02','배송중'),</a:t>
             </a:r>
@@ -5613,9 +5613,9 @@
                 <a:solidFill>
                   <a:srgbClr val="E6EAF2"/>
                 </a:solidFill>
-                <a:latin typeface="나눔고딕코딩"/>
-                <a:ea typeface="나눔고딕코딩"/>
-                <a:cs typeface="나눔고딕코딩"/>
+                <a:latin typeface="D2Coding"/>
+                <a:ea typeface="D2Coding"/>
+                <a:cs typeface="D2Coding"/>
               </a:rPr>
               <a:t> (1012,'C002',NULL,  '2026-05-16','배송중'),</a:t>
             </a:r>
@@ -5631,9 +5631,9 @@
                 <a:solidFill>
                   <a:srgbClr val="E6EAF2"/>
                 </a:solidFill>
-                <a:latin typeface="나눔고딕코딩"/>
-                <a:ea typeface="나눔고딕코딩"/>
-                <a:cs typeface="나눔고딕코딩"/>
+                <a:latin typeface="D2Coding"/>
+                <a:ea typeface="D2Coding"/>
+                <a:cs typeface="D2Coding"/>
               </a:rPr>
               <a:t> (1013,'C007','E003','2026-05-27','취소'),</a:t>
             </a:r>
@@ -5649,9 +5649,9 @@
                 <a:solidFill>
                   <a:srgbClr val="E6EAF2"/>
                 </a:solidFill>
-                <a:latin typeface="나눔고딕코딩"/>
-                <a:ea typeface="나눔고딕코딩"/>
-                <a:cs typeface="나눔고딕코딩"/>
+                <a:latin typeface="D2Coding"/>
+                <a:ea typeface="D2Coding"/>
+                <a:cs typeface="D2Coding"/>
               </a:rPr>
               <a:t> (1014,'C004',NULL,  '2026-06-04','배송중'),</a:t>
             </a:r>
@@ -5667,9 +5667,9 @@
                 <a:solidFill>
                   <a:srgbClr val="E6EAF2"/>
                 </a:solidFill>
-                <a:latin typeface="나눔고딕코딩"/>
-                <a:ea typeface="나눔고딕코딩"/>
-                <a:cs typeface="나눔고딕코딩"/>
+                <a:latin typeface="D2Coding"/>
+                <a:ea typeface="D2Coding"/>
+                <a:cs typeface="D2Coding"/>
               </a:rPr>
               <a:t> (1015,'C005','E002','2026-06-10','주문접수');</a:t>
             </a:r>
@@ -6276,9 +6276,9 @@
                 <a:solidFill>
                   <a:srgbClr val="7A869C"/>
                 </a:solidFill>
-                <a:latin typeface="나눔고딕코딩"/>
-                <a:ea typeface="나눔고딕코딩"/>
-                <a:cs typeface="나눔고딕코딩"/>
+                <a:latin typeface="D2Coding"/>
+                <a:ea typeface="D2Coding"/>
+                <a:cs typeface="D2Coding"/>
               </a:rPr>
               <a:t>1</a:t>
             </a:r>
@@ -6294,9 +6294,9 @@
                 <a:solidFill>
                   <a:srgbClr val="7A869C"/>
                 </a:solidFill>
-                <a:latin typeface="나눔고딕코딩"/>
-                <a:ea typeface="나눔고딕코딩"/>
-                <a:cs typeface="나눔고딕코딩"/>
+                <a:latin typeface="D2Coding"/>
+                <a:ea typeface="D2Coding"/>
+                <a:cs typeface="D2Coding"/>
               </a:rPr>
               <a:t>2</a:t>
             </a:r>
@@ -6312,9 +6312,9 @@
                 <a:solidFill>
                   <a:srgbClr val="7A869C"/>
                 </a:solidFill>
-                <a:latin typeface="나눔고딕코딩"/>
-                <a:ea typeface="나눔고딕코딩"/>
-                <a:cs typeface="나눔고딕코딩"/>
+                <a:latin typeface="D2Coding"/>
+                <a:ea typeface="D2Coding"/>
+                <a:cs typeface="D2Coding"/>
               </a:rPr>
               <a:t>3</a:t>
             </a:r>
@@ -6330,9 +6330,9 @@
                 <a:solidFill>
                   <a:srgbClr val="7A869C"/>
                 </a:solidFill>
-                <a:latin typeface="나눔고딕코딩"/>
-                <a:ea typeface="나눔고딕코딩"/>
-                <a:cs typeface="나눔고딕코딩"/>
+                <a:latin typeface="D2Coding"/>
+                <a:ea typeface="D2Coding"/>
+                <a:cs typeface="D2Coding"/>
               </a:rPr>
               <a:t>4</a:t>
             </a:r>
@@ -6348,9 +6348,9 @@
                 <a:solidFill>
                   <a:srgbClr val="7A869C"/>
                 </a:solidFill>
-                <a:latin typeface="나눔고딕코딩"/>
-                <a:ea typeface="나눔고딕코딩"/>
-                <a:cs typeface="나눔고딕코딩"/>
+                <a:latin typeface="D2Coding"/>
+                <a:ea typeface="D2Coding"/>
+                <a:cs typeface="D2Coding"/>
               </a:rPr>
               <a:t>5</a:t>
             </a:r>
@@ -6366,9 +6366,9 @@
                 <a:solidFill>
                   <a:srgbClr val="7A869C"/>
                 </a:solidFill>
-                <a:latin typeface="나눔고딕코딩"/>
-                <a:ea typeface="나눔고딕코딩"/>
-                <a:cs typeface="나눔고딕코딩"/>
+                <a:latin typeface="D2Coding"/>
+                <a:ea typeface="D2Coding"/>
+                <a:cs typeface="D2Coding"/>
               </a:rPr>
               <a:t>6</a:t>
             </a:r>
@@ -6384,9 +6384,9 @@
                 <a:solidFill>
                   <a:srgbClr val="7A869C"/>
                 </a:solidFill>
-                <a:latin typeface="나눔고딕코딩"/>
-                <a:ea typeface="나눔고딕코딩"/>
-                <a:cs typeface="나눔고딕코딩"/>
+                <a:latin typeface="D2Coding"/>
+                <a:ea typeface="D2Coding"/>
+                <a:cs typeface="D2Coding"/>
               </a:rPr>
               <a:t>7</a:t>
             </a:r>
@@ -6402,9 +6402,9 @@
                 <a:solidFill>
                   <a:srgbClr val="7A869C"/>
                 </a:solidFill>
-                <a:latin typeface="나눔고딕코딩"/>
-                <a:ea typeface="나눔고딕코딩"/>
-                <a:cs typeface="나눔고딕코딩"/>
+                <a:latin typeface="D2Coding"/>
+                <a:ea typeface="D2Coding"/>
+                <a:cs typeface="D2Coding"/>
               </a:rPr>
               <a:t>8</a:t>
             </a:r>
@@ -6420,9 +6420,9 @@
                 <a:solidFill>
                   <a:srgbClr val="7A869C"/>
                 </a:solidFill>
-                <a:latin typeface="나눔고딕코딩"/>
-                <a:ea typeface="나눔고딕코딩"/>
-                <a:cs typeface="나눔고딕코딩"/>
+                <a:latin typeface="D2Coding"/>
+                <a:ea typeface="D2Coding"/>
+                <a:cs typeface="D2Coding"/>
               </a:rPr>
               <a:t>9</a:t>
             </a:r>
@@ -6438,9 +6438,9 @@
                 <a:solidFill>
                   <a:srgbClr val="7A869C"/>
                 </a:solidFill>
-                <a:latin typeface="나눔고딕코딩"/>
-                <a:ea typeface="나눔고딕코딩"/>
-                <a:cs typeface="나눔고딕코딩"/>
+                <a:latin typeface="D2Coding"/>
+                <a:ea typeface="D2Coding"/>
+                <a:cs typeface="D2Coding"/>
               </a:rPr>
               <a:t>10</a:t>
             </a:r>
@@ -6456,9 +6456,9 @@
                 <a:solidFill>
                   <a:srgbClr val="7A869C"/>
                 </a:solidFill>
-                <a:latin typeface="나눔고딕코딩"/>
-                <a:ea typeface="나눔고딕코딩"/>
-                <a:cs typeface="나눔고딕코딩"/>
+                <a:latin typeface="D2Coding"/>
+                <a:ea typeface="D2Coding"/>
+                <a:cs typeface="D2Coding"/>
               </a:rPr>
               <a:t>11</a:t>
             </a:r>
@@ -6474,9 +6474,9 @@
                 <a:solidFill>
                   <a:srgbClr val="7A869C"/>
                 </a:solidFill>
-                <a:latin typeface="나눔고딕코딩"/>
-                <a:ea typeface="나눔고딕코딩"/>
-                <a:cs typeface="나눔고딕코딩"/>
+                <a:latin typeface="D2Coding"/>
+                <a:ea typeface="D2Coding"/>
+                <a:cs typeface="D2Coding"/>
               </a:rPr>
               <a:t>12</a:t>
             </a:r>
@@ -6492,9 +6492,9 @@
                 <a:solidFill>
                   <a:srgbClr val="7A869C"/>
                 </a:solidFill>
-                <a:latin typeface="나눔고딕코딩"/>
-                <a:ea typeface="나눔고딕코딩"/>
-                <a:cs typeface="나눔고딕코딩"/>
+                <a:latin typeface="D2Coding"/>
+                <a:ea typeface="D2Coding"/>
+                <a:cs typeface="D2Coding"/>
               </a:rPr>
               <a:t>13</a:t>
             </a:r>
@@ -6510,9 +6510,9 @@
                 <a:solidFill>
                   <a:srgbClr val="7A869C"/>
                 </a:solidFill>
-                <a:latin typeface="나눔고딕코딩"/>
-                <a:ea typeface="나눔고딕코딩"/>
-                <a:cs typeface="나눔고딕코딩"/>
+                <a:latin typeface="D2Coding"/>
+                <a:ea typeface="D2Coding"/>
+                <a:cs typeface="D2Coding"/>
               </a:rPr>
               <a:t>14</a:t>
             </a:r>
@@ -6528,9 +6528,9 @@
                 <a:solidFill>
                   <a:srgbClr val="7A869C"/>
                 </a:solidFill>
-                <a:latin typeface="나눔고딕코딩"/>
-                <a:ea typeface="나눔고딕코딩"/>
-                <a:cs typeface="나눔고딕코딩"/>
+                <a:latin typeface="D2Coding"/>
+                <a:ea typeface="D2Coding"/>
+                <a:cs typeface="D2Coding"/>
               </a:rPr>
               <a:t>15</a:t>
             </a:r>
@@ -6546,9 +6546,9 @@
                 <a:solidFill>
                   <a:srgbClr val="7A869C"/>
                 </a:solidFill>
-                <a:latin typeface="나눔고딕코딩"/>
-                <a:ea typeface="나눔고딕코딩"/>
-                <a:cs typeface="나눔고딕코딩"/>
+                <a:latin typeface="D2Coding"/>
+                <a:ea typeface="D2Coding"/>
+                <a:cs typeface="D2Coding"/>
               </a:rPr>
               <a:t>16</a:t>
             </a:r>
@@ -6564,9 +6564,9 @@
                 <a:solidFill>
                   <a:srgbClr val="7A869C"/>
                 </a:solidFill>
-                <a:latin typeface="나눔고딕코딩"/>
-                <a:ea typeface="나눔고딕코딩"/>
-                <a:cs typeface="나눔고딕코딩"/>
+                <a:latin typeface="D2Coding"/>
+                <a:ea typeface="D2Coding"/>
+                <a:cs typeface="D2Coding"/>
               </a:rPr>
               <a:t>17</a:t>
             </a:r>
@@ -6605,9 +6605,9 @@
                 <a:solidFill>
                   <a:srgbClr val="E6EAF2"/>
                 </a:solidFill>
-                <a:latin typeface="나눔고딕코딩"/>
-                <a:ea typeface="나눔고딕코딩"/>
-                <a:cs typeface="나눔고딕코딩"/>
+                <a:latin typeface="D2Coding"/>
+                <a:ea typeface="D2Coding"/>
+                <a:cs typeface="D2Coding"/>
               </a:rPr>
               <a:t>-- 값 순서: order_id, prod_id, qty(수량), unit_price(주문 당시 단가)</a:t>
             </a:r>
@@ -6623,9 +6623,9 @@
                 <a:solidFill>
                   <a:srgbClr val="E6EAF2"/>
                 </a:solidFill>
-                <a:latin typeface="나눔고딕코딩"/>
-                <a:ea typeface="나눔고딕코딩"/>
-                <a:cs typeface="나눔고딕코딩"/>
+                <a:latin typeface="D2Coding"/>
+                <a:ea typeface="D2Coding"/>
+                <a:cs typeface="D2Coding"/>
               </a:rPr>
               <a:t>INSERT INTO order_items VALUES</a:t>
             </a:r>
@@ -6641,9 +6641,9 @@
                 <a:solidFill>
                   <a:srgbClr val="E6EAF2"/>
                 </a:solidFill>
-                <a:latin typeface="나눔고딕코딩"/>
-                <a:ea typeface="나눔고딕코딩"/>
-                <a:cs typeface="나눔고딕코딩"/>
+                <a:latin typeface="D2Coding"/>
+                <a:ea typeface="D2Coding"/>
+                <a:cs typeface="D2Coding"/>
               </a:rPr>
               <a:t> (1001,'P001',1,42000),(1001,'P003',2,18500),</a:t>
             </a:r>
@@ -6659,9 +6659,9 @@
                 <a:solidFill>
                   <a:srgbClr val="E6EAF2"/>
                 </a:solidFill>
-                <a:latin typeface="나눔고딕코딩"/>
-                <a:ea typeface="나눔고딕코딩"/>
-                <a:cs typeface="나눔고딕코딩"/>
+                <a:latin typeface="D2Coding"/>
+                <a:ea typeface="D2Coding"/>
+                <a:cs typeface="D2Coding"/>
               </a:rPr>
               <a:t> (1002,'P006',3,6900),(1002,'P007',1,12500),</a:t>
             </a:r>
@@ -6677,9 +6677,9 @@
                 <a:solidFill>
                   <a:srgbClr val="E6EAF2"/>
                 </a:solidFill>
-                <a:latin typeface="나눔고딕코딩"/>
-                <a:ea typeface="나눔고딕코딩"/>
-                <a:cs typeface="나눔고딕코딩"/>
+                <a:latin typeface="D2Coding"/>
+                <a:ea typeface="D2Coding"/>
+                <a:cs typeface="D2Coding"/>
               </a:rPr>
               <a:t> (1003,'P002',1,189000),</a:t>
             </a:r>
@@ -6695,9 +6695,9 @@
                 <a:solidFill>
                   <a:srgbClr val="E6EAF2"/>
                 </a:solidFill>
-                <a:latin typeface="나눔고딕코딩"/>
-                <a:ea typeface="나눔고딕코딩"/>
-                <a:cs typeface="나눔고딕코딩"/>
+                <a:latin typeface="D2Coding"/>
+                <a:ea typeface="D2Coding"/>
+                <a:cs typeface="D2Coding"/>
               </a:rPr>
               <a:t> (1004,'P005',2,15800),(1004,'P009',5,4500),</a:t>
             </a:r>
@@ -6713,9 +6713,9 @@
                 <a:solidFill>
                   <a:srgbClr val="E6EAF2"/>
                 </a:solidFill>
-                <a:latin typeface="나눔고딕코딩"/>
-                <a:ea typeface="나눔고딕코딩"/>
-                <a:cs typeface="나눔고딕코딩"/>
+                <a:latin typeface="D2Coding"/>
+                <a:ea typeface="D2Coding"/>
+                <a:cs typeface="D2Coding"/>
               </a:rPr>
               <a:t> (1005,'P004',2,24000),</a:t>
             </a:r>
@@ -6731,9 +6731,9 @@
                 <a:solidFill>
                   <a:srgbClr val="E6EAF2"/>
                 </a:solidFill>
-                <a:latin typeface="나눔고딕코딩"/>
-                <a:ea typeface="나눔고딕코딩"/>
-                <a:cs typeface="나눔고딕코딩"/>
+                <a:latin typeface="D2Coding"/>
+                <a:ea typeface="D2Coding"/>
+                <a:cs typeface="D2Coding"/>
               </a:rPr>
               <a:t> (1006,'P003',1,18500),(1006,'P006',2,6900),</a:t>
             </a:r>
@@ -6749,9 +6749,9 @@
                 <a:solidFill>
                   <a:srgbClr val="E6EAF2"/>
                 </a:solidFill>
-                <a:latin typeface="나눔고딕코딩"/>
-                <a:ea typeface="나눔고딕코딩"/>
-                <a:cs typeface="나눔고딕코딩"/>
+                <a:latin typeface="D2Coding"/>
+                <a:ea typeface="D2Coding"/>
+                <a:cs typeface="D2Coding"/>
               </a:rPr>
               <a:t> (1007,'P007',2,12500),(1007,'P008',1,9800),</a:t>
             </a:r>
@@ -6767,9 +6767,9 @@
                 <a:solidFill>
                   <a:srgbClr val="E6EAF2"/>
                 </a:solidFill>
-                <a:latin typeface="나눔고딕코딩"/>
-                <a:ea typeface="나눔고딕코딩"/>
-                <a:cs typeface="나눔고딕코딩"/>
+                <a:latin typeface="D2Coding"/>
+                <a:ea typeface="D2Coding"/>
+                <a:cs typeface="D2Coding"/>
               </a:rPr>
               <a:t> (1008,'P001',1,42000),(1008,'P004',3,24000),</a:t>
             </a:r>
@@ -6785,9 +6785,9 @@
                 <a:solidFill>
                   <a:srgbClr val="E6EAF2"/>
                 </a:solidFill>
-                <a:latin typeface="나눔고딕코딩"/>
-                <a:ea typeface="나눔고딕코딩"/>
-                <a:cs typeface="나눔고딕코딩"/>
+                <a:latin typeface="D2Coding"/>
+                <a:ea typeface="D2Coding"/>
+                <a:cs typeface="D2Coding"/>
               </a:rPr>
               <a:t> (1009,'P009',10,4500),</a:t>
             </a:r>
@@ -6803,9 +6803,9 @@
                 <a:solidFill>
                   <a:srgbClr val="E6EAF2"/>
                 </a:solidFill>
-                <a:latin typeface="나눔고딕코딩"/>
-                <a:ea typeface="나눔고딕코딩"/>
-                <a:cs typeface="나눔고딕코딩"/>
+                <a:latin typeface="D2Coding"/>
+                <a:ea typeface="D2Coding"/>
+                <a:cs typeface="D2Coding"/>
               </a:rPr>
               <a:t> (1010,'P002',1,189000),(1010,'P003',2,18500),</a:t>
             </a:r>
@@ -6821,9 +6821,9 @@
                 <a:solidFill>
                   <a:srgbClr val="E6EAF2"/>
                 </a:solidFill>
-                <a:latin typeface="나눔고딕코딩"/>
-                <a:ea typeface="나눔고딕코딩"/>
-                <a:cs typeface="나눔고딕코딩"/>
+                <a:latin typeface="D2Coding"/>
+                <a:ea typeface="D2Coding"/>
+                <a:cs typeface="D2Coding"/>
               </a:rPr>
               <a:t> (1011,'P005',3,15800),</a:t>
             </a:r>
@@ -6839,9 +6839,9 @@
                 <a:solidFill>
                   <a:srgbClr val="E6EAF2"/>
                 </a:solidFill>
-                <a:latin typeface="나눔고딕코딩"/>
-                <a:ea typeface="나눔고딕코딩"/>
-                <a:cs typeface="나눔고딕코딩"/>
+                <a:latin typeface="D2Coding"/>
+                <a:ea typeface="D2Coding"/>
+                <a:cs typeface="D2Coding"/>
               </a:rPr>
               <a:t> (1012,'P008',2,9800),(1012,'P006',1,6900),</a:t>
             </a:r>
@@ -6857,9 +6857,9 @@
                 <a:solidFill>
                   <a:srgbClr val="E6EAF2"/>
                 </a:solidFill>
-                <a:latin typeface="나눔고딕코딩"/>
-                <a:ea typeface="나눔고딕코딩"/>
-                <a:cs typeface="나눔고딕코딩"/>
+                <a:latin typeface="D2Coding"/>
+                <a:ea typeface="D2Coding"/>
+                <a:cs typeface="D2Coding"/>
               </a:rPr>
               <a:t> (1013,'P003',1,18500),</a:t>
             </a:r>
@@ -6875,9 +6875,9 @@
                 <a:solidFill>
                   <a:srgbClr val="E6EAF2"/>
                 </a:solidFill>
-                <a:latin typeface="나눔고딕코딩"/>
-                <a:ea typeface="나눔고딕코딩"/>
-                <a:cs typeface="나눔고딕코딩"/>
+                <a:latin typeface="D2Coding"/>
+                <a:ea typeface="D2Coding"/>
+                <a:cs typeface="D2Coding"/>
               </a:rPr>
               <a:t> (1014,'P007',1,12500),(1014,'P009',3,4500),</a:t>
             </a:r>
@@ -6893,9 +6893,9 @@
                 <a:solidFill>
                   <a:srgbClr val="E6EAF2"/>
                 </a:solidFill>
-                <a:latin typeface="나눔고딕코딩"/>
-                <a:ea typeface="나눔고딕코딩"/>
-                <a:cs typeface="나눔고딕코딩"/>
+                <a:latin typeface="D2Coding"/>
+                <a:ea typeface="D2Coding"/>
+                <a:cs typeface="D2Coding"/>
               </a:rPr>
               <a:t> (1015,'P001',1,42000),(1015,'P005',1,15800);</a:t>
             </a:r>
@@ -7597,9 +7597,9 @@
                 <a:solidFill>
                   <a:srgbClr val="E6EAF2"/>
                 </a:solidFill>
-                <a:latin typeface="나눔고딕코딩"/>
-                <a:ea typeface="나눔고딕코딩"/>
-                <a:cs typeface="나눔고딕코딩"/>
+                <a:latin typeface="D2Coding"/>
+                <a:ea typeface="D2Coding"/>
+                <a:cs typeface="D2Coding"/>
               </a:rPr>
               <a:t>SELECT COUNT(*) FROM employees;</a:t>
             </a:r>
@@ -7816,9 +7816,9 @@
                 <a:solidFill>
                   <a:srgbClr val="E6EAF2"/>
                 </a:solidFill>
-                <a:latin typeface="나눔고딕코딩"/>
-                <a:ea typeface="나눔고딕코딩"/>
-                <a:cs typeface="나눔고딕코딩"/>
+                <a:latin typeface="D2Coding"/>
+                <a:ea typeface="D2Coding"/>
+                <a:cs typeface="D2Coding"/>
               </a:rPr>
               <a:t>SELECT COUNT(*) FROM customers;</a:t>
             </a:r>
@@ -8035,9 +8035,9 @@
                 <a:solidFill>
                   <a:srgbClr val="E6EAF2"/>
                 </a:solidFill>
-                <a:latin typeface="나눔고딕코딩"/>
-                <a:ea typeface="나눔고딕코딩"/>
-                <a:cs typeface="나눔고딕코딩"/>
+                <a:latin typeface="D2Coding"/>
+                <a:ea typeface="D2Coding"/>
+                <a:cs typeface="D2Coding"/>
               </a:rPr>
               <a:t>SELECT COUNT(*) FROM products;</a:t>
             </a:r>
@@ -8254,9 +8254,9 @@
                 <a:solidFill>
                   <a:srgbClr val="E6EAF2"/>
                 </a:solidFill>
-                <a:latin typeface="나눔고딕코딩"/>
-                <a:ea typeface="나눔고딕코딩"/>
-                <a:cs typeface="나눔고딕코딩"/>
+                <a:latin typeface="D2Coding"/>
+                <a:ea typeface="D2Coding"/>
+                <a:cs typeface="D2Coding"/>
               </a:rPr>
               <a:t>SELECT COUNT(*) FROM orders;</a:t>
             </a:r>
@@ -8473,9 +8473,9 @@
                 <a:solidFill>
                   <a:srgbClr val="E6EAF2"/>
                 </a:solidFill>
-                <a:latin typeface="나눔고딕코딩"/>
-                <a:ea typeface="나눔고딕코딩"/>
-                <a:cs typeface="나눔고딕코딩"/>
+                <a:latin typeface="D2Coding"/>
+                <a:ea typeface="D2Coding"/>
+                <a:cs typeface="D2Coding"/>
               </a:rPr>
               <a:t>SELECT COUNT(*) FROM order_items;</a:t>
             </a:r>
@@ -11196,9 +11196,9 @@
                 <a:solidFill>
                   <a:srgbClr val="7A869C"/>
                 </a:solidFill>
-                <a:latin typeface="나눔고딕코딩"/>
-                <a:ea typeface="나눔고딕코딩"/>
-                <a:cs typeface="나눔고딕코딩"/>
+                <a:latin typeface="D2Coding"/>
+                <a:ea typeface="D2Coding"/>
+                <a:cs typeface="D2Coding"/>
               </a:rPr>
               <a:t>1</a:t>
             </a:r>
@@ -11214,9 +11214,9 @@
                 <a:solidFill>
                   <a:srgbClr val="7A869C"/>
                 </a:solidFill>
-                <a:latin typeface="나눔고딕코딩"/>
-                <a:ea typeface="나눔고딕코딩"/>
-                <a:cs typeface="나눔고딕코딩"/>
+                <a:latin typeface="D2Coding"/>
+                <a:ea typeface="D2Coding"/>
+                <a:cs typeface="D2Coding"/>
               </a:rPr>
               <a:t>2</a:t>
             </a:r>
@@ -11232,9 +11232,9 @@
                 <a:solidFill>
                   <a:srgbClr val="7A869C"/>
                 </a:solidFill>
-                <a:latin typeface="나눔고딕코딩"/>
-                <a:ea typeface="나눔고딕코딩"/>
-                <a:cs typeface="나눔고딕코딩"/>
+                <a:latin typeface="D2Coding"/>
+                <a:ea typeface="D2Coding"/>
+                <a:cs typeface="D2Coding"/>
               </a:rPr>
               <a:t>3</a:t>
             </a:r>
@@ -11250,9 +11250,9 @@
                 <a:solidFill>
                   <a:srgbClr val="7A869C"/>
                 </a:solidFill>
-                <a:latin typeface="나눔고딕코딩"/>
-                <a:ea typeface="나눔고딕코딩"/>
-                <a:cs typeface="나눔고딕코딩"/>
+                <a:latin typeface="D2Coding"/>
+                <a:ea typeface="D2Coding"/>
+                <a:cs typeface="D2Coding"/>
               </a:rPr>
               <a:t>4</a:t>
             </a:r>
@@ -11268,9 +11268,9 @@
                 <a:solidFill>
                   <a:srgbClr val="7A869C"/>
                 </a:solidFill>
-                <a:latin typeface="나눔고딕코딩"/>
-                <a:ea typeface="나눔고딕코딩"/>
-                <a:cs typeface="나눔고딕코딩"/>
+                <a:latin typeface="D2Coding"/>
+                <a:ea typeface="D2Coding"/>
+                <a:cs typeface="D2Coding"/>
               </a:rPr>
               <a:t>5</a:t>
             </a:r>
@@ -11286,9 +11286,9 @@
                 <a:solidFill>
                   <a:srgbClr val="7A869C"/>
                 </a:solidFill>
-                <a:latin typeface="나눔고딕코딩"/>
-                <a:ea typeface="나눔고딕코딩"/>
-                <a:cs typeface="나눔고딕코딩"/>
+                <a:latin typeface="D2Coding"/>
+                <a:ea typeface="D2Coding"/>
+                <a:cs typeface="D2Coding"/>
               </a:rPr>
               <a:t>6</a:t>
             </a:r>
@@ -11304,9 +11304,9 @@
                 <a:solidFill>
                   <a:srgbClr val="7A869C"/>
                 </a:solidFill>
-                <a:latin typeface="나눔고딕코딩"/>
-                <a:ea typeface="나눔고딕코딩"/>
-                <a:cs typeface="나눔고딕코딩"/>
+                <a:latin typeface="D2Coding"/>
+                <a:ea typeface="D2Coding"/>
+                <a:cs typeface="D2Coding"/>
               </a:rPr>
               <a:t>7</a:t>
             </a:r>
@@ -11322,9 +11322,9 @@
                 <a:solidFill>
                   <a:srgbClr val="7A869C"/>
                 </a:solidFill>
-                <a:latin typeface="나눔고딕코딩"/>
-                <a:ea typeface="나눔고딕코딩"/>
-                <a:cs typeface="나눔고딕코딩"/>
+                <a:latin typeface="D2Coding"/>
+                <a:ea typeface="D2Coding"/>
+                <a:cs typeface="D2Coding"/>
               </a:rPr>
               <a:t>8</a:t>
             </a:r>
@@ -11340,9 +11340,9 @@
                 <a:solidFill>
                   <a:srgbClr val="7A869C"/>
                 </a:solidFill>
-                <a:latin typeface="나눔고딕코딩"/>
-                <a:ea typeface="나눔고딕코딩"/>
-                <a:cs typeface="나눔고딕코딩"/>
+                <a:latin typeface="D2Coding"/>
+                <a:ea typeface="D2Coding"/>
+                <a:cs typeface="D2Coding"/>
               </a:rPr>
               <a:t>9</a:t>
             </a:r>
@@ -11358,9 +11358,9 @@
                 <a:solidFill>
                   <a:srgbClr val="7A869C"/>
                 </a:solidFill>
-                <a:latin typeface="나눔고딕코딩"/>
-                <a:ea typeface="나눔고딕코딩"/>
-                <a:cs typeface="나눔고딕코딩"/>
+                <a:latin typeface="D2Coding"/>
+                <a:ea typeface="D2Coding"/>
+                <a:cs typeface="D2Coding"/>
               </a:rPr>
               <a:t>10</a:t>
             </a:r>
@@ -11376,9 +11376,9 @@
                 <a:solidFill>
                   <a:srgbClr val="7A869C"/>
                 </a:solidFill>
-                <a:latin typeface="나눔고딕코딩"/>
-                <a:ea typeface="나눔고딕코딩"/>
-                <a:cs typeface="나눔고딕코딩"/>
+                <a:latin typeface="D2Coding"/>
+                <a:ea typeface="D2Coding"/>
+                <a:cs typeface="D2Coding"/>
               </a:rPr>
               <a:t>11</a:t>
             </a:r>
@@ -11417,9 +11417,9 @@
                 <a:solidFill>
                   <a:srgbClr val="E6EAF2"/>
                 </a:solidFill>
-                <a:latin typeface="나눔고딕코딩"/>
-                <a:ea typeface="나눔고딕코딩"/>
-                <a:cs typeface="나눔고딕코딩"/>
+                <a:latin typeface="D2Coding"/>
+                <a:ea typeface="D2Coding"/>
+                <a:cs typeface="D2Coding"/>
               </a:rPr>
               <a:t>-- 단일 컬럼 수정: 상품 가격 조정</a:t>
             </a:r>
@@ -11435,9 +11435,9 @@
                 <a:solidFill>
                   <a:srgbClr val="E6EAF2"/>
                 </a:solidFill>
-                <a:latin typeface="나눔고딕코딩"/>
-                <a:ea typeface="나눔고딕코딩"/>
-                <a:cs typeface="나눔고딕코딩"/>
+                <a:latin typeface="D2Coding"/>
+                <a:ea typeface="D2Coding"/>
+                <a:cs typeface="D2Coding"/>
               </a:rPr>
               <a:t>UPDATE products SET price = 45000 WHERE prod_id = 'P001';</a:t>
             </a:r>
@@ -11453,9 +11453,9 @@
                 <a:solidFill>
                   <a:srgbClr val="E6EAF2"/>
                 </a:solidFill>
-                <a:latin typeface="나눔고딕코딩"/>
-                <a:ea typeface="나눔고딕코딩"/>
-                <a:cs typeface="나눔고딕코딩"/>
+                <a:latin typeface="D2Coding"/>
+                <a:ea typeface="D2Coding"/>
+                <a:cs typeface="D2Coding"/>
               </a:rPr>
               <a:t/>
             </a:r>
@@ -11471,9 +11471,9 @@
                 <a:solidFill>
                   <a:srgbClr val="E6EAF2"/>
                 </a:solidFill>
-                <a:latin typeface="나눔고딕코딩"/>
-                <a:ea typeface="나눔고딕코딩"/>
-                <a:cs typeface="나눔고딕코딩"/>
+                <a:latin typeface="D2Coding"/>
+                <a:ea typeface="D2Coding"/>
+                <a:cs typeface="D2Coding"/>
               </a:rPr>
               <a:t>-- 여러 컬럼 동시 수정: 등급 승격 + 축하 포인트 지급</a:t>
             </a:r>
@@ -11489,9 +11489,9 @@
                 <a:solidFill>
                   <a:srgbClr val="E6EAF2"/>
                 </a:solidFill>
-                <a:latin typeface="나눔고딕코딩"/>
-                <a:ea typeface="나눔고딕코딩"/>
-                <a:cs typeface="나눔고딕코딩"/>
+                <a:latin typeface="D2Coding"/>
+                <a:ea typeface="D2Coding"/>
+                <a:cs typeface="D2Coding"/>
               </a:rPr>
               <a:t>UPDATE customers</a:t>
             </a:r>
@@ -11507,9 +11507,9 @@
                 <a:solidFill>
                   <a:srgbClr val="E6EAF2"/>
                 </a:solidFill>
-                <a:latin typeface="나눔고딕코딩"/>
-                <a:ea typeface="나눔고딕코딩"/>
-                <a:cs typeface="나눔고딕코딩"/>
+                <a:latin typeface="D2Coding"/>
+                <a:ea typeface="D2Coding"/>
+                <a:cs typeface="D2Coding"/>
               </a:rPr>
               <a:t>SET    grade  = 'GOLD',</a:t>
             </a:r>
@@ -11525,9 +11525,9 @@
                 <a:solidFill>
                   <a:srgbClr val="E6EAF2"/>
                 </a:solidFill>
-                <a:latin typeface="나눔고딕코딩"/>
-                <a:ea typeface="나눔고딕코딩"/>
-                <a:cs typeface="나눔고딕코딩"/>
+                <a:latin typeface="D2Coding"/>
+                <a:ea typeface="D2Coding"/>
+                <a:cs typeface="D2Coding"/>
               </a:rPr>
               <a:t>       points = points + 1000</a:t>
             </a:r>
@@ -11543,9 +11543,9 @@
                 <a:solidFill>
                   <a:srgbClr val="E6EAF2"/>
                 </a:solidFill>
-                <a:latin typeface="나눔고딕코딩"/>
-                <a:ea typeface="나눔고딕코딩"/>
-                <a:cs typeface="나눔고딕코딩"/>
+                <a:latin typeface="D2Coding"/>
+                <a:ea typeface="D2Coding"/>
+                <a:cs typeface="D2Coding"/>
               </a:rPr>
               <a:t>WHERE  cust_id = 'C003';</a:t>
             </a:r>
@@ -11561,9 +11561,9 @@
                 <a:solidFill>
                   <a:srgbClr val="E6EAF2"/>
                 </a:solidFill>
-                <a:latin typeface="나눔고딕코딩"/>
-                <a:ea typeface="나눔고딕코딩"/>
-                <a:cs typeface="나눔고딕코딩"/>
+                <a:latin typeface="D2Coding"/>
+                <a:ea typeface="D2Coding"/>
+                <a:cs typeface="D2Coding"/>
               </a:rPr>
               <a:t/>
             </a:r>
@@ -11579,9 +11579,9 @@
                 <a:solidFill>
                   <a:srgbClr val="E6EAF2"/>
                 </a:solidFill>
-                <a:latin typeface="나눔고딕코딩"/>
-                <a:ea typeface="나눔고딕코딩"/>
-                <a:cs typeface="나눔고딕코딩"/>
+                <a:latin typeface="D2Coding"/>
+                <a:ea typeface="D2Coding"/>
+                <a:cs typeface="D2Coding"/>
               </a:rPr>
               <a:t>-- 계산식 수정: 주문이 확정되면 재고를 차감</a:t>
             </a:r>
@@ -11597,9 +11597,9 @@
                 <a:solidFill>
                   <a:srgbClr val="E6EAF2"/>
                 </a:solidFill>
-                <a:latin typeface="나눔고딕코딩"/>
-                <a:ea typeface="나눔고딕코딩"/>
-                <a:cs typeface="나눔고딕코딩"/>
+                <a:latin typeface="D2Coding"/>
+                <a:ea typeface="D2Coding"/>
+                <a:cs typeface="D2Coding"/>
               </a:rPr>
               <a:t>UPDATE products SET stock = stock - 1 WHERE prod_id = 'P001';</a:t>
             </a:r>
@@ -13291,9 +13291,9 @@
                 <a:solidFill>
                   <a:srgbClr val="7A869C"/>
                 </a:solidFill>
-                <a:latin typeface="나눔고딕코딩"/>
-                <a:ea typeface="나눔고딕코딩"/>
-                <a:cs typeface="나눔고딕코딩"/>
+                <a:latin typeface="D2Coding"/>
+                <a:ea typeface="D2Coding"/>
+                <a:cs typeface="D2Coding"/>
               </a:rPr>
               <a:t>1</a:t>
             </a:r>
@@ -13309,9 +13309,9 @@
                 <a:solidFill>
                   <a:srgbClr val="7A869C"/>
                 </a:solidFill>
-                <a:latin typeface="나눔고딕코딩"/>
-                <a:ea typeface="나눔고딕코딩"/>
-                <a:cs typeface="나눔고딕코딩"/>
+                <a:latin typeface="D2Coding"/>
+                <a:ea typeface="D2Coding"/>
+                <a:cs typeface="D2Coding"/>
               </a:rPr>
               <a:t>2</a:t>
             </a:r>
@@ -13327,9 +13327,9 @@
                 <a:solidFill>
                   <a:srgbClr val="7A869C"/>
                 </a:solidFill>
-                <a:latin typeface="나눔고딕코딩"/>
-                <a:ea typeface="나눔고딕코딩"/>
-                <a:cs typeface="나눔고딕코딩"/>
+                <a:latin typeface="D2Coding"/>
+                <a:ea typeface="D2Coding"/>
+                <a:cs typeface="D2Coding"/>
               </a:rPr>
               <a:t>3</a:t>
             </a:r>
@@ -13345,9 +13345,9 @@
                 <a:solidFill>
                   <a:srgbClr val="7A869C"/>
                 </a:solidFill>
-                <a:latin typeface="나눔고딕코딩"/>
-                <a:ea typeface="나눔고딕코딩"/>
-                <a:cs typeface="나눔고딕코딩"/>
+                <a:latin typeface="D2Coding"/>
+                <a:ea typeface="D2Coding"/>
+                <a:cs typeface="D2Coding"/>
               </a:rPr>
               <a:t>4</a:t>
             </a:r>
@@ -13386,9 +13386,9 @@
                 <a:solidFill>
                   <a:srgbClr val="E6EAF2"/>
                 </a:solidFill>
-                <a:latin typeface="나눔고딕코딩"/>
-                <a:ea typeface="나눔고딕코딩"/>
-                <a:cs typeface="나눔고딕코딩"/>
+                <a:latin typeface="D2Coding"/>
+                <a:ea typeface="D2Coding"/>
+                <a:cs typeface="D2Coding"/>
               </a:rPr>
               <a:t>UPDATE customers</a:t>
             </a:r>
@@ -13404,9 +13404,9 @@
                 <a:solidFill>
                   <a:srgbClr val="E6EAF2"/>
                 </a:solidFill>
-                <a:latin typeface="나눔고딕코딩"/>
-                <a:ea typeface="나눔고딕코딩"/>
-                <a:cs typeface="나눔고딕코딩"/>
+                <a:latin typeface="D2Coding"/>
+                <a:ea typeface="D2Coding"/>
+                <a:cs typeface="D2Coding"/>
               </a:rPr>
               <a:t>SET    grade = CASE WHEN points &gt;= 4000 THEN 'VIP'</a:t>
             </a:r>
@@ -13422,9 +13422,9 @@
                 <a:solidFill>
                   <a:srgbClr val="E6EAF2"/>
                 </a:solidFill>
-                <a:latin typeface="나눔고딕코딩"/>
-                <a:ea typeface="나눔고딕코딩"/>
-                <a:cs typeface="나눔고딕코딩"/>
+                <a:latin typeface="D2Coding"/>
+                <a:ea typeface="D2Coding"/>
+                <a:cs typeface="D2Coding"/>
               </a:rPr>
               <a:t>                    WHEN points &gt;= 1500 THEN 'GOLD'</a:t>
             </a:r>
@@ -13440,9 +13440,9 @@
                 <a:solidFill>
                   <a:srgbClr val="E6EAF2"/>
                 </a:solidFill>
-                <a:latin typeface="나눔고딕코딩"/>
-                <a:ea typeface="나눔고딕코딩"/>
-                <a:cs typeface="나눔고딕코딩"/>
+                <a:latin typeface="D2Coding"/>
+                <a:ea typeface="D2Coding"/>
+                <a:cs typeface="D2Coding"/>
               </a:rPr>
               <a:t>                    ELSE 'SILVER' END;</a:t>
             </a:r>
@@ -16823,9 +16823,9 @@
                 <a:solidFill>
                   <a:srgbClr val="7A869C"/>
                 </a:solidFill>
-                <a:latin typeface="나눔고딕코딩"/>
-                <a:ea typeface="나눔고딕코딩"/>
-                <a:cs typeface="나눔고딕코딩"/>
+                <a:latin typeface="D2Coding"/>
+                <a:ea typeface="D2Coding"/>
+                <a:cs typeface="D2Coding"/>
               </a:rPr>
               <a:t>1</a:t>
             </a:r>
@@ -16841,9 +16841,9 @@
                 <a:solidFill>
                   <a:srgbClr val="7A869C"/>
                 </a:solidFill>
-                <a:latin typeface="나눔고딕코딩"/>
-                <a:ea typeface="나눔고딕코딩"/>
-                <a:cs typeface="나눔고딕코딩"/>
+                <a:latin typeface="D2Coding"/>
+                <a:ea typeface="D2Coding"/>
+                <a:cs typeface="D2Coding"/>
               </a:rPr>
               <a:t>2</a:t>
             </a:r>
@@ -16859,9 +16859,9 @@
                 <a:solidFill>
                   <a:srgbClr val="7A869C"/>
                 </a:solidFill>
-                <a:latin typeface="나눔고딕코딩"/>
-                <a:ea typeface="나눔고딕코딩"/>
-                <a:cs typeface="나눔고딕코딩"/>
+                <a:latin typeface="D2Coding"/>
+                <a:ea typeface="D2Coding"/>
+                <a:cs typeface="D2Coding"/>
               </a:rPr>
               <a:t>3</a:t>
             </a:r>
@@ -16877,9 +16877,9 @@
                 <a:solidFill>
                   <a:srgbClr val="7A869C"/>
                 </a:solidFill>
-                <a:latin typeface="나눔고딕코딩"/>
-                <a:ea typeface="나눔고딕코딩"/>
-                <a:cs typeface="나눔고딕코딩"/>
+                <a:latin typeface="D2Coding"/>
+                <a:ea typeface="D2Coding"/>
+                <a:cs typeface="D2Coding"/>
               </a:rPr>
               <a:t>4</a:t>
             </a:r>
@@ -16895,9 +16895,9 @@
                 <a:solidFill>
                   <a:srgbClr val="7A869C"/>
                 </a:solidFill>
-                <a:latin typeface="나눔고딕코딩"/>
-                <a:ea typeface="나눔고딕코딩"/>
-                <a:cs typeface="나눔고딕코딩"/>
+                <a:latin typeface="D2Coding"/>
+                <a:ea typeface="D2Coding"/>
+                <a:cs typeface="D2Coding"/>
               </a:rPr>
               <a:t>5</a:t>
             </a:r>
@@ -16913,9 +16913,9 @@
                 <a:solidFill>
                   <a:srgbClr val="7A869C"/>
                 </a:solidFill>
-                <a:latin typeface="나눔고딕코딩"/>
-                <a:ea typeface="나눔고딕코딩"/>
-                <a:cs typeface="나눔고딕코딩"/>
+                <a:latin typeface="D2Coding"/>
+                <a:ea typeface="D2Coding"/>
+                <a:cs typeface="D2Coding"/>
               </a:rPr>
               <a:t>6</a:t>
             </a:r>
@@ -16931,9 +16931,9 @@
                 <a:solidFill>
                   <a:srgbClr val="7A869C"/>
                 </a:solidFill>
-                <a:latin typeface="나눔고딕코딩"/>
-                <a:ea typeface="나눔고딕코딩"/>
-                <a:cs typeface="나눔고딕코딩"/>
+                <a:latin typeface="D2Coding"/>
+                <a:ea typeface="D2Coding"/>
+                <a:cs typeface="D2Coding"/>
               </a:rPr>
               <a:t>7</a:t>
             </a:r>
@@ -16949,9 +16949,9 @@
                 <a:solidFill>
                   <a:srgbClr val="7A869C"/>
                 </a:solidFill>
-                <a:latin typeface="나눔고딕코딩"/>
-                <a:ea typeface="나눔고딕코딩"/>
-                <a:cs typeface="나눔고딕코딩"/>
+                <a:latin typeface="D2Coding"/>
+                <a:ea typeface="D2Coding"/>
+                <a:cs typeface="D2Coding"/>
               </a:rPr>
               <a:t>8</a:t>
             </a:r>
@@ -16990,9 +16990,9 @@
                 <a:solidFill>
                   <a:srgbClr val="E6EAF2"/>
                 </a:solidFill>
-                <a:latin typeface="나눔고딕코딩"/>
-                <a:ea typeface="나눔고딕코딩"/>
-                <a:cs typeface="나눔고딕코딩"/>
+                <a:latin typeface="D2Coding"/>
+                <a:ea typeface="D2Coding"/>
+                <a:cs typeface="D2Coding"/>
               </a:rPr>
               <a:t>-- DELETE: 조건에 맞는 행만 삭제 (DML, 롤백 가능)</a:t>
             </a:r>
@@ -17008,9 +17008,9 @@
                 <a:solidFill>
                   <a:srgbClr val="E6EAF2"/>
                 </a:solidFill>
-                <a:latin typeface="나눔고딕코딩"/>
-                <a:ea typeface="나눔고딕코딩"/>
-                <a:cs typeface="나눔고딕코딩"/>
+                <a:latin typeface="D2Coding"/>
+                <a:ea typeface="D2Coding"/>
+                <a:cs typeface="D2Coding"/>
               </a:rPr>
               <a:t>DELETE FROM vip_customers WHERE points &lt; 5000;</a:t>
             </a:r>
@@ -17026,9 +17026,9 @@
                 <a:solidFill>
                   <a:srgbClr val="E6EAF2"/>
                 </a:solidFill>
-                <a:latin typeface="나눔고딕코딩"/>
-                <a:ea typeface="나눔고딕코딩"/>
-                <a:cs typeface="나눔고딕코딩"/>
+                <a:latin typeface="D2Coding"/>
+                <a:ea typeface="D2Coding"/>
+                <a:cs typeface="D2Coding"/>
               </a:rPr>
               <a:t/>
             </a:r>
@@ -17044,9 +17044,9 @@
                 <a:solidFill>
                   <a:srgbClr val="E6EAF2"/>
                 </a:solidFill>
-                <a:latin typeface="나눔고딕코딩"/>
-                <a:ea typeface="나눔고딕코딩"/>
-                <a:cs typeface="나눔고딕코딩"/>
+                <a:latin typeface="D2Coding"/>
+                <a:ea typeface="D2Coding"/>
+                <a:cs typeface="D2Coding"/>
               </a:rPr>
               <a:t>-- TRUNCATE: 전체 행을 즉시 제거 (DDL, 롤백 불가, AUTO_INCREMENT 초기화)</a:t>
             </a:r>
@@ -17062,9 +17062,9 @@
                 <a:solidFill>
                   <a:srgbClr val="E6EAF2"/>
                 </a:solidFill>
-                <a:latin typeface="나눔고딕코딩"/>
-                <a:ea typeface="나눔고딕코딩"/>
-                <a:cs typeface="나눔고딕코딩"/>
+                <a:latin typeface="D2Coding"/>
+                <a:ea typeface="D2Coding"/>
+                <a:cs typeface="D2Coding"/>
               </a:rPr>
               <a:t>TRUNCATE TABLE vip_customers;</a:t>
             </a:r>
@@ -17080,9 +17080,9 @@
                 <a:solidFill>
                   <a:srgbClr val="E6EAF2"/>
                 </a:solidFill>
-                <a:latin typeface="나눔고딕코딩"/>
-                <a:ea typeface="나눔고딕코딩"/>
-                <a:cs typeface="나눔고딕코딩"/>
+                <a:latin typeface="D2Coding"/>
+                <a:ea typeface="D2Coding"/>
+                <a:cs typeface="D2Coding"/>
               </a:rPr>
               <a:t/>
             </a:r>
@@ -17098,9 +17098,9 @@
                 <a:solidFill>
                   <a:srgbClr val="E6EAF2"/>
                 </a:solidFill>
-                <a:latin typeface="나눔고딕코딩"/>
-                <a:ea typeface="나눔고딕코딩"/>
-                <a:cs typeface="나눔고딕코딩"/>
+                <a:latin typeface="D2Coding"/>
+                <a:ea typeface="D2Coding"/>
+                <a:cs typeface="D2Coding"/>
               </a:rPr>
               <a:t>-- DROP: 테이블 구조 자체를 삭제</a:t>
             </a:r>
@@ -17116,9 +17116,9 @@
                 <a:solidFill>
                   <a:srgbClr val="E6EAF2"/>
                 </a:solidFill>
-                <a:latin typeface="나눔고딕코딩"/>
-                <a:ea typeface="나눔고딕코딩"/>
-                <a:cs typeface="나눔고딕코딩"/>
+                <a:latin typeface="D2Coding"/>
+                <a:ea typeface="D2Coding"/>
+                <a:cs typeface="D2Coding"/>
               </a:rPr>
               <a:t>DROP TABLE vip_customers;</a:t>
             </a:r>
@@ -26020,9 +26020,9 @@
                 <a:solidFill>
                   <a:srgbClr val="7A869C"/>
                 </a:solidFill>
-                <a:latin typeface="나눔고딕코딩"/>
-                <a:ea typeface="나눔고딕코딩"/>
-                <a:cs typeface="나눔고딕코딩"/>
+                <a:latin typeface="D2Coding"/>
+                <a:ea typeface="D2Coding"/>
+                <a:cs typeface="D2Coding"/>
               </a:rPr>
               <a:t>1</a:t>
             </a:r>
@@ -26038,9 +26038,9 @@
                 <a:solidFill>
                   <a:srgbClr val="7A869C"/>
                 </a:solidFill>
-                <a:latin typeface="나눔고딕코딩"/>
-                <a:ea typeface="나눔고딕코딩"/>
-                <a:cs typeface="나눔고딕코딩"/>
+                <a:latin typeface="D2Coding"/>
+                <a:ea typeface="D2Coding"/>
+                <a:cs typeface="D2Coding"/>
               </a:rPr>
               <a:t>2</a:t>
             </a:r>
@@ -26056,9 +26056,9 @@
                 <a:solidFill>
                   <a:srgbClr val="7A869C"/>
                 </a:solidFill>
-                <a:latin typeface="나눔고딕코딩"/>
-                <a:ea typeface="나눔고딕코딩"/>
-                <a:cs typeface="나눔고딕코딩"/>
+                <a:latin typeface="D2Coding"/>
+                <a:ea typeface="D2Coding"/>
+                <a:cs typeface="D2Coding"/>
               </a:rPr>
               <a:t>3</a:t>
             </a:r>
@@ -26074,9 +26074,9 @@
                 <a:solidFill>
                   <a:srgbClr val="7A869C"/>
                 </a:solidFill>
-                <a:latin typeface="나눔고딕코딩"/>
-                <a:ea typeface="나눔고딕코딩"/>
-                <a:cs typeface="나눔고딕코딩"/>
+                <a:latin typeface="D2Coding"/>
+                <a:ea typeface="D2Coding"/>
+                <a:cs typeface="D2Coding"/>
               </a:rPr>
               <a:t>4</a:t>
             </a:r>
@@ -26092,9 +26092,9 @@
                 <a:solidFill>
                   <a:srgbClr val="7A869C"/>
                 </a:solidFill>
-                <a:latin typeface="나눔고딕코딩"/>
-                <a:ea typeface="나눔고딕코딩"/>
-                <a:cs typeface="나눔고딕코딩"/>
+                <a:latin typeface="D2Coding"/>
+                <a:ea typeface="D2Coding"/>
+                <a:cs typeface="D2Coding"/>
               </a:rPr>
               <a:t>5</a:t>
             </a:r>
@@ -26110,9 +26110,9 @@
                 <a:solidFill>
                   <a:srgbClr val="7A869C"/>
                 </a:solidFill>
-                <a:latin typeface="나눔고딕코딩"/>
-                <a:ea typeface="나눔고딕코딩"/>
-                <a:cs typeface="나눔고딕코딩"/>
+                <a:latin typeface="D2Coding"/>
+                <a:ea typeface="D2Coding"/>
+                <a:cs typeface="D2Coding"/>
               </a:rPr>
               <a:t>6</a:t>
             </a:r>
@@ -26128,9 +26128,9 @@
                 <a:solidFill>
                   <a:srgbClr val="7A869C"/>
                 </a:solidFill>
-                <a:latin typeface="나눔고딕코딩"/>
-                <a:ea typeface="나눔고딕코딩"/>
-                <a:cs typeface="나눔고딕코딩"/>
+                <a:latin typeface="D2Coding"/>
+                <a:ea typeface="D2Coding"/>
+                <a:cs typeface="D2Coding"/>
               </a:rPr>
               <a:t>7</a:t>
             </a:r>
@@ -26146,9 +26146,9 @@
                 <a:solidFill>
                   <a:srgbClr val="7A869C"/>
                 </a:solidFill>
-                <a:latin typeface="나눔고딕코딩"/>
-                <a:ea typeface="나눔고딕코딩"/>
-                <a:cs typeface="나눔고딕코딩"/>
+                <a:latin typeface="D2Coding"/>
+                <a:ea typeface="D2Coding"/>
+                <a:cs typeface="D2Coding"/>
               </a:rPr>
               <a:t>8</a:t>
             </a:r>
@@ -26164,9 +26164,9 @@
                 <a:solidFill>
                   <a:srgbClr val="7A869C"/>
                 </a:solidFill>
-                <a:latin typeface="나눔고딕코딩"/>
-                <a:ea typeface="나눔고딕코딩"/>
-                <a:cs typeface="나눔고딕코딩"/>
+                <a:latin typeface="D2Coding"/>
+                <a:ea typeface="D2Coding"/>
+                <a:cs typeface="D2Coding"/>
               </a:rPr>
               <a:t>9</a:t>
             </a:r>
@@ -26205,9 +26205,9 @@
                 <a:solidFill>
                   <a:srgbClr val="E6EAF2"/>
                 </a:solidFill>
-                <a:latin typeface="나눔고딕코딩"/>
-                <a:ea typeface="나눔고딕코딩"/>
-                <a:cs typeface="나눔고딕코딩"/>
+                <a:latin typeface="D2Coding"/>
+                <a:ea typeface="D2Coding"/>
+                <a:cs typeface="D2Coding"/>
               </a:rPr>
               <a:t>SELECT @@autocommit;      -- MySQL 기본값 1 (문장마다 자동 확정)</a:t>
             </a:r>
@@ -26223,9 +26223,9 @@
                 <a:solidFill>
                   <a:srgbClr val="E6EAF2"/>
                 </a:solidFill>
-                <a:latin typeface="나눔고딕코딩"/>
-                <a:ea typeface="나눔고딕코딩"/>
-                <a:cs typeface="나눔고딕코딩"/>
+                <a:latin typeface="D2Coding"/>
+                <a:ea typeface="D2Coding"/>
+                <a:cs typeface="D2Coding"/>
               </a:rPr>
               <a:t>SET autocommit = 0;</a:t>
             </a:r>
@@ -26241,9 +26241,9 @@
                 <a:solidFill>
                   <a:srgbClr val="E6EAF2"/>
                 </a:solidFill>
-                <a:latin typeface="나눔고딕코딩"/>
-                <a:ea typeface="나눔고딕코딩"/>
-                <a:cs typeface="나눔고딕코딩"/>
+                <a:latin typeface="D2Coding"/>
+                <a:ea typeface="D2Coding"/>
+                <a:cs typeface="D2Coding"/>
               </a:rPr>
               <a:t/>
             </a:r>
@@ -26259,9 +26259,9 @@
                 <a:solidFill>
                   <a:srgbClr val="E6EAF2"/>
                 </a:solidFill>
-                <a:latin typeface="나눔고딕코딩"/>
-                <a:ea typeface="나눔고딕코딩"/>
-                <a:cs typeface="나눔고딕코딩"/>
+                <a:latin typeface="D2Coding"/>
+                <a:ea typeface="D2Coding"/>
+                <a:cs typeface="D2Coding"/>
               </a:rPr>
               <a:t>START TRANSACTION;</a:t>
             </a:r>
@@ -26277,9 +26277,9 @@
                 <a:solidFill>
                   <a:srgbClr val="E6EAF2"/>
                 </a:solidFill>
-                <a:latin typeface="나눔고딕코딩"/>
-                <a:ea typeface="나눔고딕코딩"/>
-                <a:cs typeface="나눔고딕코딩"/>
+                <a:latin typeface="D2Coding"/>
+                <a:ea typeface="D2Coding"/>
+                <a:cs typeface="D2Coding"/>
               </a:rPr>
               <a:t>UPDATE orders   SET status = '취소'    WHERE order_id = 1005;</a:t>
             </a:r>
@@ -26295,9 +26295,9 @@
                 <a:solidFill>
                   <a:srgbClr val="E6EAF2"/>
                 </a:solidFill>
-                <a:latin typeface="나눔고딕코딩"/>
-                <a:ea typeface="나눔고딕코딩"/>
-                <a:cs typeface="나눔고딕코딩"/>
+                <a:latin typeface="D2Coding"/>
+                <a:ea typeface="D2Coding"/>
+                <a:cs typeface="D2Coding"/>
               </a:rPr>
               <a:t>UPDATE products SET stock  = stock + 2 WHERE prod_id  = 'P004';</a:t>
             </a:r>
@@ -26313,9 +26313,9 @@
                 <a:solidFill>
                   <a:srgbClr val="E6EAF2"/>
                 </a:solidFill>
-                <a:latin typeface="나눔고딕코딩"/>
-                <a:ea typeface="나눔고딕코딩"/>
-                <a:cs typeface="나눔고딕코딩"/>
+                <a:latin typeface="D2Coding"/>
+                <a:ea typeface="D2Coding"/>
+                <a:cs typeface="D2Coding"/>
               </a:rPr>
               <a:t/>
             </a:r>
@@ -26331,9 +26331,9 @@
                 <a:solidFill>
                   <a:srgbClr val="E6EAF2"/>
                 </a:solidFill>
-                <a:latin typeface="나눔고딕코딩"/>
-                <a:ea typeface="나눔고딕코딩"/>
-                <a:cs typeface="나눔고딕코딩"/>
+                <a:latin typeface="D2Coding"/>
+                <a:ea typeface="D2Coding"/>
+                <a:cs typeface="D2Coding"/>
               </a:rPr>
               <a:t>COMMIT;                   -- 확정 (되돌릴 수 없음)</a:t>
             </a:r>
@@ -26349,9 +26349,9 @@
                 <a:solidFill>
                   <a:srgbClr val="E6EAF2"/>
                 </a:solidFill>
-                <a:latin typeface="나눔고딕코딩"/>
-                <a:ea typeface="나눔고딕코딩"/>
-                <a:cs typeface="나눔고딕코딩"/>
+                <a:latin typeface="D2Coding"/>
+                <a:ea typeface="D2Coding"/>
+                <a:cs typeface="D2Coding"/>
               </a:rPr>
               <a:t>-- ROLLBACK;              -- 취소 (START TRANSACTION 시점으로 복원)</a:t>
             </a:r>
@@ -28348,9 +28348,9 @@
                 <a:solidFill>
                   <a:srgbClr val="7A869C"/>
                 </a:solidFill>
-                <a:latin typeface="나눔고딕코딩"/>
-                <a:ea typeface="나눔고딕코딩"/>
-                <a:cs typeface="나눔고딕코딩"/>
+                <a:latin typeface="D2Coding"/>
+                <a:ea typeface="D2Coding"/>
+                <a:cs typeface="D2Coding"/>
               </a:rPr>
               <a:t>1</a:t>
             </a:r>
@@ -28366,9 +28366,9 @@
                 <a:solidFill>
                   <a:srgbClr val="7A869C"/>
                 </a:solidFill>
-                <a:latin typeface="나눔고딕코딩"/>
-                <a:ea typeface="나눔고딕코딩"/>
-                <a:cs typeface="나눔고딕코딩"/>
+                <a:latin typeface="D2Coding"/>
+                <a:ea typeface="D2Coding"/>
+                <a:cs typeface="D2Coding"/>
               </a:rPr>
               <a:t>2</a:t>
             </a:r>
@@ -28384,9 +28384,9 @@
                 <a:solidFill>
                   <a:srgbClr val="7A869C"/>
                 </a:solidFill>
-                <a:latin typeface="나눔고딕코딩"/>
-                <a:ea typeface="나눔고딕코딩"/>
-                <a:cs typeface="나눔고딕코딩"/>
+                <a:latin typeface="D2Coding"/>
+                <a:ea typeface="D2Coding"/>
+                <a:cs typeface="D2Coding"/>
               </a:rPr>
               <a:t>3</a:t>
             </a:r>
@@ -28402,9 +28402,9 @@
                 <a:solidFill>
                   <a:srgbClr val="7A869C"/>
                 </a:solidFill>
-                <a:latin typeface="나눔고딕코딩"/>
-                <a:ea typeface="나눔고딕코딩"/>
-                <a:cs typeface="나눔고딕코딩"/>
+                <a:latin typeface="D2Coding"/>
+                <a:ea typeface="D2Coding"/>
+                <a:cs typeface="D2Coding"/>
               </a:rPr>
               <a:t>4</a:t>
             </a:r>
@@ -28420,9 +28420,9 @@
                 <a:solidFill>
                   <a:srgbClr val="7A869C"/>
                 </a:solidFill>
-                <a:latin typeface="나눔고딕코딩"/>
-                <a:ea typeface="나눔고딕코딩"/>
-                <a:cs typeface="나눔고딕코딩"/>
+                <a:latin typeface="D2Coding"/>
+                <a:ea typeface="D2Coding"/>
+                <a:cs typeface="D2Coding"/>
               </a:rPr>
               <a:t>5</a:t>
             </a:r>
@@ -28438,9 +28438,9 @@
                 <a:solidFill>
                   <a:srgbClr val="7A869C"/>
                 </a:solidFill>
-                <a:latin typeface="나눔고딕코딩"/>
-                <a:ea typeface="나눔고딕코딩"/>
-                <a:cs typeface="나눔고딕코딩"/>
+                <a:latin typeface="D2Coding"/>
+                <a:ea typeface="D2Coding"/>
+                <a:cs typeface="D2Coding"/>
               </a:rPr>
               <a:t>6</a:t>
             </a:r>
@@ -28479,9 +28479,9 @@
                 <a:solidFill>
                   <a:srgbClr val="E6EAF2"/>
                 </a:solidFill>
-                <a:latin typeface="나눔고딕코딩"/>
-                <a:ea typeface="나눔고딕코딩"/>
-                <a:cs typeface="나눔고딕코딩"/>
+                <a:latin typeface="D2Coding"/>
+                <a:ea typeface="D2Coding"/>
+                <a:cs typeface="D2Coding"/>
               </a:rPr>
               <a:t>START TRANSACTION;</a:t>
             </a:r>
@@ -28497,9 +28497,9 @@
                 <a:solidFill>
                   <a:srgbClr val="E6EAF2"/>
                 </a:solidFill>
-                <a:latin typeface="나눔고딕코딩"/>
-                <a:ea typeface="나눔고딕코딩"/>
-                <a:cs typeface="나눔고딕코딩"/>
+                <a:latin typeface="D2Coding"/>
+                <a:ea typeface="D2Coding"/>
+                <a:cs typeface="D2Coding"/>
               </a:rPr>
               <a:t>  UPDATE customers SET points = points + 500 WHERE cust_id = 'C001';</a:t>
             </a:r>
@@ -28515,9 +28515,9 @@
                 <a:solidFill>
                   <a:srgbClr val="E6EAF2"/>
                 </a:solidFill>
-                <a:latin typeface="나눔고딕코딩"/>
-                <a:ea typeface="나눔고딕코딩"/>
-                <a:cs typeface="나눔고딕코딩"/>
+                <a:latin typeface="D2Coding"/>
+                <a:ea typeface="D2Coding"/>
+                <a:cs typeface="D2Coding"/>
               </a:rPr>
               <a:t>  SAVEPOINT sp1;</a:t>
             </a:r>
@@ -28533,9 +28533,9 @@
                 <a:solidFill>
                   <a:srgbClr val="E6EAF2"/>
                 </a:solidFill>
-                <a:latin typeface="나눔고딕코딩"/>
-                <a:ea typeface="나눔고딕코딩"/>
-                <a:cs typeface="나눔고딕코딩"/>
+                <a:latin typeface="D2Coding"/>
+                <a:ea typeface="D2Coding"/>
+                <a:cs typeface="D2Coding"/>
               </a:rPr>
               <a:t>  UPDATE customers SET points = points + 500 WHERE cust_id = 'C002';</a:t>
             </a:r>
@@ -28551,9 +28551,9 @@
                 <a:solidFill>
                   <a:srgbClr val="E6EAF2"/>
                 </a:solidFill>
-                <a:latin typeface="나눔고딕코딩"/>
-                <a:ea typeface="나눔고딕코딩"/>
-                <a:cs typeface="나눔고딕코딩"/>
+                <a:latin typeface="D2Coding"/>
+                <a:ea typeface="D2Coding"/>
+                <a:cs typeface="D2Coding"/>
               </a:rPr>
               <a:t>  ROLLBACK TO SAVEPOINT sp1;   -- C002 적립만 취소, C001 적립은 유지</a:t>
             </a:r>
@@ -28569,9 +28569,9 @@
                 <a:solidFill>
                   <a:srgbClr val="E6EAF2"/>
                 </a:solidFill>
-                <a:latin typeface="나눔고딕코딩"/>
-                <a:ea typeface="나눔고딕코딩"/>
-                <a:cs typeface="나눔고딕코딩"/>
+                <a:latin typeface="D2Coding"/>
+                <a:ea typeface="D2Coding"/>
+                <a:cs typeface="D2Coding"/>
               </a:rPr>
               <a:t>COMMIT;                        -- C001 적립만 최종 반영</a:t>
             </a:r>
@@ -37422,9 +37422,9 @@
                 <a:solidFill>
                   <a:srgbClr val="7A869C"/>
                 </a:solidFill>
-                <a:latin typeface="나눔고딕코딩"/>
-                <a:ea typeface="나눔고딕코딩"/>
-                <a:cs typeface="나눔고딕코딩"/>
+                <a:latin typeface="D2Coding"/>
+                <a:ea typeface="D2Coding"/>
+                <a:cs typeface="D2Coding"/>
               </a:rPr>
               <a:t>1</a:t>
             </a:r>
@@ -37440,9 +37440,9 @@
                 <a:solidFill>
                   <a:srgbClr val="7A869C"/>
                 </a:solidFill>
-                <a:latin typeface="나눔고딕코딩"/>
-                <a:ea typeface="나눔고딕코딩"/>
-                <a:cs typeface="나눔고딕코딩"/>
+                <a:latin typeface="D2Coding"/>
+                <a:ea typeface="D2Coding"/>
+                <a:cs typeface="D2Coding"/>
               </a:rPr>
               <a:t>2</a:t>
             </a:r>
@@ -37458,9 +37458,9 @@
                 <a:solidFill>
                   <a:srgbClr val="7A869C"/>
                 </a:solidFill>
-                <a:latin typeface="나눔고딕코딩"/>
-                <a:ea typeface="나눔고딕코딩"/>
-                <a:cs typeface="나눔고딕코딩"/>
+                <a:latin typeface="D2Coding"/>
+                <a:ea typeface="D2Coding"/>
+                <a:cs typeface="D2Coding"/>
               </a:rPr>
               <a:t>3</a:t>
             </a:r>
@@ -37476,9 +37476,9 @@
                 <a:solidFill>
                   <a:srgbClr val="7A869C"/>
                 </a:solidFill>
-                <a:latin typeface="나눔고딕코딩"/>
-                <a:ea typeface="나눔고딕코딩"/>
-                <a:cs typeface="나눔고딕코딩"/>
+                <a:latin typeface="D2Coding"/>
+                <a:ea typeface="D2Coding"/>
+                <a:cs typeface="D2Coding"/>
               </a:rPr>
               <a:t>4</a:t>
             </a:r>
@@ -37494,9 +37494,9 @@
                 <a:solidFill>
                   <a:srgbClr val="7A869C"/>
                 </a:solidFill>
-                <a:latin typeface="나눔고딕코딩"/>
-                <a:ea typeface="나눔고딕코딩"/>
-                <a:cs typeface="나눔고딕코딩"/>
+                <a:latin typeface="D2Coding"/>
+                <a:ea typeface="D2Coding"/>
+                <a:cs typeface="D2Coding"/>
               </a:rPr>
               <a:t>5</a:t>
             </a:r>
@@ -37512,9 +37512,9 @@
                 <a:solidFill>
                   <a:srgbClr val="7A869C"/>
                 </a:solidFill>
-                <a:latin typeface="나눔고딕코딩"/>
-                <a:ea typeface="나눔고딕코딩"/>
-                <a:cs typeface="나눔고딕코딩"/>
+                <a:latin typeface="D2Coding"/>
+                <a:ea typeface="D2Coding"/>
+                <a:cs typeface="D2Coding"/>
               </a:rPr>
               <a:t>6</a:t>
             </a:r>
@@ -37530,9 +37530,9 @@
                 <a:solidFill>
                   <a:srgbClr val="7A869C"/>
                 </a:solidFill>
-                <a:latin typeface="나눔고딕코딩"/>
-                <a:ea typeface="나눔고딕코딩"/>
-                <a:cs typeface="나눔고딕코딩"/>
+                <a:latin typeface="D2Coding"/>
+                <a:ea typeface="D2Coding"/>
+                <a:cs typeface="D2Coding"/>
               </a:rPr>
               <a:t>7</a:t>
             </a:r>
@@ -37548,9 +37548,9 @@
                 <a:solidFill>
                   <a:srgbClr val="7A869C"/>
                 </a:solidFill>
-                <a:latin typeface="나눔고딕코딩"/>
-                <a:ea typeface="나눔고딕코딩"/>
-                <a:cs typeface="나눔고딕코딩"/>
+                <a:latin typeface="D2Coding"/>
+                <a:ea typeface="D2Coding"/>
+                <a:cs typeface="D2Coding"/>
               </a:rPr>
               <a:t>8</a:t>
             </a:r>
@@ -37566,9 +37566,9 @@
                 <a:solidFill>
                   <a:srgbClr val="7A869C"/>
                 </a:solidFill>
-                <a:latin typeface="나눔고딕코딩"/>
-                <a:ea typeface="나눔고딕코딩"/>
-                <a:cs typeface="나눔고딕코딩"/>
+                <a:latin typeface="D2Coding"/>
+                <a:ea typeface="D2Coding"/>
+                <a:cs typeface="D2Coding"/>
               </a:rPr>
               <a:t>9</a:t>
             </a:r>
@@ -37584,9 +37584,9 @@
                 <a:solidFill>
                   <a:srgbClr val="7A869C"/>
                 </a:solidFill>
-                <a:latin typeface="나눔고딕코딩"/>
-                <a:ea typeface="나눔고딕코딩"/>
-                <a:cs typeface="나눔고딕코딩"/>
+                <a:latin typeface="D2Coding"/>
+                <a:ea typeface="D2Coding"/>
+                <a:cs typeface="D2Coding"/>
               </a:rPr>
               <a:t>10</a:t>
             </a:r>
@@ -37602,9 +37602,9 @@
                 <a:solidFill>
                   <a:srgbClr val="7A869C"/>
                 </a:solidFill>
-                <a:latin typeface="나눔고딕코딩"/>
-                <a:ea typeface="나눔고딕코딩"/>
-                <a:cs typeface="나눔고딕코딩"/>
+                <a:latin typeface="D2Coding"/>
+                <a:ea typeface="D2Coding"/>
+                <a:cs typeface="D2Coding"/>
               </a:rPr>
               <a:t>11</a:t>
             </a:r>
@@ -37643,9 +37643,9 @@
                 <a:solidFill>
                   <a:srgbClr val="E6EAF2"/>
                 </a:solidFill>
-                <a:latin typeface="나눔고딕코딩"/>
-                <a:ea typeface="나눔고딕코딩"/>
-                <a:cs typeface="나눔고딕코딩"/>
+                <a:latin typeface="D2Coding"/>
+                <a:ea typeface="D2Coding"/>
+                <a:cs typeface="D2Coding"/>
               </a:rPr>
               <a:t>-- ① 컬럼 지정 (권장): 테이블 구조가 바뀌어도 안전</a:t>
             </a:r>
@@ -37661,9 +37661,9 @@
                 <a:solidFill>
                   <a:srgbClr val="E6EAF2"/>
                 </a:solidFill>
-                <a:latin typeface="나눔고딕코딩"/>
-                <a:ea typeface="나눔고딕코딩"/>
-                <a:cs typeface="나눔고딕코딩"/>
+                <a:latin typeface="D2Coding"/>
+                <a:ea typeface="D2Coding"/>
+                <a:cs typeface="D2Coding"/>
               </a:rPr>
               <a:t>INSERT INTO customers (cust_id, name, grade, city, email, joined_date, points)</a:t>
             </a:r>
@@ -37679,9 +37679,9 @@
                 <a:solidFill>
                   <a:srgbClr val="E6EAF2"/>
                 </a:solidFill>
-                <a:latin typeface="나눔고딕코딩"/>
-                <a:ea typeface="나눔고딕코딩"/>
-                <a:cs typeface="나눔고딕코딩"/>
+                <a:latin typeface="D2Coding"/>
+                <a:ea typeface="D2Coding"/>
+                <a:cs typeface="D2Coding"/>
               </a:rPr>
               <a:t>VALUES ('C011', '강현우', 'SILVER', '서울', 'hyunwoo@example.com', '2026-07-01', 0);</a:t>
             </a:r>
@@ -37697,9 +37697,9 @@
                 <a:solidFill>
                   <a:srgbClr val="E6EAF2"/>
                 </a:solidFill>
-                <a:latin typeface="나눔고딕코딩"/>
-                <a:ea typeface="나눔고딕코딩"/>
-                <a:cs typeface="나눔고딕코딩"/>
+                <a:latin typeface="D2Coding"/>
+                <a:ea typeface="D2Coding"/>
+                <a:cs typeface="D2Coding"/>
               </a:rPr>
               <a:t/>
             </a:r>
@@ -37715,9 +37715,9 @@
                 <a:solidFill>
                   <a:srgbClr val="E6EAF2"/>
                 </a:solidFill>
-                <a:latin typeface="나눔고딕코딩"/>
-                <a:ea typeface="나눔고딕코딩"/>
-                <a:cs typeface="나눔고딕코딩"/>
+                <a:latin typeface="D2Coding"/>
+                <a:ea typeface="D2Coding"/>
+                <a:cs typeface="D2Coding"/>
               </a:rPr>
               <a:t>-- ② 컬럼 생략: 반드시 테이블 정의 순서대로 모든 값을 나열</a:t>
             </a:r>
@@ -37733,9 +37733,9 @@
                 <a:solidFill>
                   <a:srgbClr val="E6EAF2"/>
                 </a:solidFill>
-                <a:latin typeface="나눔고딕코딩"/>
-                <a:ea typeface="나눔고딕코딩"/>
-                <a:cs typeface="나눔고딕코딩"/>
+                <a:latin typeface="D2Coding"/>
+                <a:ea typeface="D2Coding"/>
+                <a:cs typeface="D2Coding"/>
               </a:rPr>
               <a:t>INSERT INTO customers</a:t>
             </a:r>
@@ -37751,9 +37751,9 @@
                 <a:solidFill>
                   <a:srgbClr val="E6EAF2"/>
                 </a:solidFill>
-                <a:latin typeface="나눔고딕코딩"/>
-                <a:ea typeface="나눔고딕코딩"/>
-                <a:cs typeface="나눔고딕코딩"/>
+                <a:latin typeface="D2Coding"/>
+                <a:ea typeface="D2Coding"/>
+                <a:cs typeface="D2Coding"/>
               </a:rPr>
               <a:t>VALUES ('C012', '노은채', 'SILVER', '대구', 'eunchae@example.com', '2026-07-03', 0);</a:t>
             </a:r>
@@ -37769,9 +37769,9 @@
                 <a:solidFill>
                   <a:srgbClr val="E6EAF2"/>
                 </a:solidFill>
-                <a:latin typeface="나눔고딕코딩"/>
-                <a:ea typeface="나눔고딕코딩"/>
-                <a:cs typeface="나눔고딕코딩"/>
+                <a:latin typeface="D2Coding"/>
+                <a:ea typeface="D2Coding"/>
+                <a:cs typeface="D2Coding"/>
               </a:rPr>
               <a:t/>
             </a:r>
@@ -37787,9 +37787,9 @@
                 <a:solidFill>
                   <a:srgbClr val="E6EAF2"/>
                 </a:solidFill>
-                <a:latin typeface="나눔고딕코딩"/>
-                <a:ea typeface="나눔고딕코딩"/>
-                <a:cs typeface="나눔고딕코딩"/>
+                <a:latin typeface="D2Coding"/>
+                <a:ea typeface="D2Coding"/>
+                <a:cs typeface="D2Coding"/>
               </a:rPr>
               <a:t>-- ③ 일부 컬럼만 지정: 나머지는 DEFAULT 값 또는 NULL이 들어간다</a:t>
             </a:r>
@@ -37805,9 +37805,9 @@
                 <a:solidFill>
                   <a:srgbClr val="E6EAF2"/>
                 </a:solidFill>
-                <a:latin typeface="나눔고딕코딩"/>
-                <a:ea typeface="나눔고딕코딩"/>
-                <a:cs typeface="나눔고딕코딩"/>
+                <a:latin typeface="D2Coding"/>
+                <a:ea typeface="D2Coding"/>
+                <a:cs typeface="D2Coding"/>
               </a:rPr>
               <a:t>INSERT INTO customers (cust_id, name, joined_date)</a:t>
             </a:r>
@@ -37823,9 +37823,9 @@
                 <a:solidFill>
                   <a:srgbClr val="E6EAF2"/>
                 </a:solidFill>
-                <a:latin typeface="나눔고딕코딩"/>
-                <a:ea typeface="나눔고딕코딩"/>
-                <a:cs typeface="나눔고딕코딩"/>
+                <a:latin typeface="D2Coding"/>
+                <a:ea typeface="D2Coding"/>
+                <a:cs typeface="D2Coding"/>
               </a:rPr>
               <a:t>VALUES ('C013', '유지호', '2026-07-05');</a:t>
             </a:r>
@@ -39577,9 +39577,9 @@
                 <a:solidFill>
                   <a:srgbClr val="7A869C"/>
                 </a:solidFill>
-                <a:latin typeface="나눔고딕코딩"/>
-                <a:ea typeface="나눔고딕코딩"/>
-                <a:cs typeface="나눔고딕코딩"/>
+                <a:latin typeface="D2Coding"/>
+                <a:ea typeface="D2Coding"/>
+                <a:cs typeface="D2Coding"/>
               </a:rPr>
               <a:t>1</a:t>
             </a:r>
@@ -39595,9 +39595,9 @@
                 <a:solidFill>
                   <a:srgbClr val="7A869C"/>
                 </a:solidFill>
-                <a:latin typeface="나눔고딕코딩"/>
-                <a:ea typeface="나눔고딕코딩"/>
-                <a:cs typeface="나눔고딕코딩"/>
+                <a:latin typeface="D2Coding"/>
+                <a:ea typeface="D2Coding"/>
+                <a:cs typeface="D2Coding"/>
               </a:rPr>
               <a:t>2</a:t>
             </a:r>
@@ -39613,9 +39613,9 @@
                 <a:solidFill>
                   <a:srgbClr val="7A869C"/>
                 </a:solidFill>
-                <a:latin typeface="나눔고딕코딩"/>
-                <a:ea typeface="나눔고딕코딩"/>
-                <a:cs typeface="나눔고딕코딩"/>
+                <a:latin typeface="D2Coding"/>
+                <a:ea typeface="D2Coding"/>
+                <a:cs typeface="D2Coding"/>
               </a:rPr>
               <a:t>3</a:t>
             </a:r>
@@ -39631,9 +39631,9 @@
                 <a:solidFill>
                   <a:srgbClr val="7A869C"/>
                 </a:solidFill>
-                <a:latin typeface="나눔고딕코딩"/>
-                <a:ea typeface="나눔고딕코딩"/>
-                <a:cs typeface="나눔고딕코딩"/>
+                <a:latin typeface="D2Coding"/>
+                <a:ea typeface="D2Coding"/>
+                <a:cs typeface="D2Coding"/>
               </a:rPr>
               <a:t>4</a:t>
             </a:r>
@@ -39649,9 +39649,9 @@
                 <a:solidFill>
                   <a:srgbClr val="7A869C"/>
                 </a:solidFill>
-                <a:latin typeface="나눔고딕코딩"/>
-                <a:ea typeface="나눔고딕코딩"/>
-                <a:cs typeface="나눔고딕코딩"/>
+                <a:latin typeface="D2Coding"/>
+                <a:ea typeface="D2Coding"/>
+                <a:cs typeface="D2Coding"/>
               </a:rPr>
               <a:t>5</a:t>
             </a:r>
@@ -39667,9 +39667,9 @@
                 <a:solidFill>
                   <a:srgbClr val="7A869C"/>
                 </a:solidFill>
-                <a:latin typeface="나눔고딕코딩"/>
-                <a:ea typeface="나눔고딕코딩"/>
-                <a:cs typeface="나눔고딕코딩"/>
+                <a:latin typeface="D2Coding"/>
+                <a:ea typeface="D2Coding"/>
+                <a:cs typeface="D2Coding"/>
               </a:rPr>
               <a:t>6</a:t>
             </a:r>
@@ -39685,9 +39685,9 @@
                 <a:solidFill>
                   <a:srgbClr val="7A869C"/>
                 </a:solidFill>
-                <a:latin typeface="나눔고딕코딩"/>
-                <a:ea typeface="나눔고딕코딩"/>
-                <a:cs typeface="나눔고딕코딩"/>
+                <a:latin typeface="D2Coding"/>
+                <a:ea typeface="D2Coding"/>
+                <a:cs typeface="D2Coding"/>
               </a:rPr>
               <a:t>7</a:t>
             </a:r>
@@ -39703,9 +39703,9 @@
                 <a:solidFill>
                   <a:srgbClr val="7A869C"/>
                 </a:solidFill>
-                <a:latin typeface="나눔고딕코딩"/>
-                <a:ea typeface="나눔고딕코딩"/>
-                <a:cs typeface="나눔고딕코딩"/>
+                <a:latin typeface="D2Coding"/>
+                <a:ea typeface="D2Coding"/>
+                <a:cs typeface="D2Coding"/>
               </a:rPr>
               <a:t>8</a:t>
             </a:r>
@@ -39721,9 +39721,9 @@
                 <a:solidFill>
                   <a:srgbClr val="7A869C"/>
                 </a:solidFill>
-                <a:latin typeface="나눔고딕코딩"/>
-                <a:ea typeface="나눔고딕코딩"/>
-                <a:cs typeface="나눔고딕코딩"/>
+                <a:latin typeface="D2Coding"/>
+                <a:ea typeface="D2Coding"/>
+                <a:cs typeface="D2Coding"/>
               </a:rPr>
               <a:t>9</a:t>
             </a:r>
@@ -39762,9 +39762,9 @@
                 <a:solidFill>
                   <a:srgbClr val="E6EAF2"/>
                 </a:solidFill>
-                <a:latin typeface="나눔고딕코딩"/>
-                <a:ea typeface="나눔고딕코딩"/>
-                <a:cs typeface="나눔고딕코딩"/>
+                <a:latin typeface="D2Coding"/>
+                <a:ea typeface="D2Coding"/>
+                <a:cs typeface="D2Coding"/>
               </a:rPr>
               <a:t>-- ④ 여러 행 한 번에 (성능상 유리)</a:t>
             </a:r>
@@ -39780,9 +39780,9 @@
                 <a:solidFill>
                   <a:srgbClr val="E6EAF2"/>
                 </a:solidFill>
-                <a:latin typeface="나눔고딕코딩"/>
-                <a:ea typeface="나눔고딕코딩"/>
-                <a:cs typeface="나눔고딕코딩"/>
+                <a:latin typeface="D2Coding"/>
+                <a:ea typeface="D2Coding"/>
+                <a:cs typeface="D2Coding"/>
               </a:rPr>
               <a:t>INSERT INTO products (prod_id, name, category, price, stock) VALUES</a:t>
             </a:r>
@@ -39798,9 +39798,9 @@
                 <a:solidFill>
                   <a:srgbClr val="E6EAF2"/>
                 </a:solidFill>
-                <a:latin typeface="나눔고딕코딩"/>
-                <a:ea typeface="나눔고딕코딩"/>
-                <a:cs typeface="나눔고딕코딩"/>
+                <a:latin typeface="D2Coding"/>
+                <a:ea typeface="D2Coding"/>
+                <a:cs typeface="D2Coding"/>
               </a:rPr>
               <a:t> ('P011', '스테인리스 텀블러', '생활용품', 15000, 40),</a:t>
             </a:r>
@@ -39816,9 +39816,9 @@
                 <a:solidFill>
                   <a:srgbClr val="E6EAF2"/>
                 </a:solidFill>
-                <a:latin typeface="나눔고딕코딩"/>
-                <a:ea typeface="나눔고딕코딩"/>
-                <a:cs typeface="나눔고딕코딩"/>
+                <a:latin typeface="D2Coding"/>
+                <a:ea typeface="D2Coding"/>
+                <a:cs typeface="D2Coding"/>
               </a:rPr>
               <a:t> ('P012', '형광펜 5색 세트', '문구', 5500, 150);</a:t>
             </a:r>
@@ -39834,9 +39834,9 @@
                 <a:solidFill>
                   <a:srgbClr val="E6EAF2"/>
                 </a:solidFill>
-                <a:latin typeface="나눔고딕코딩"/>
-                <a:ea typeface="나눔고딕코딩"/>
-                <a:cs typeface="나눔고딕코딩"/>
+                <a:latin typeface="D2Coding"/>
+                <a:ea typeface="D2Coding"/>
+                <a:cs typeface="D2Coding"/>
               </a:rPr>
               <a:t/>
             </a:r>
@@ -39852,9 +39852,9 @@
                 <a:solidFill>
                   <a:srgbClr val="E6EAF2"/>
                 </a:solidFill>
-                <a:latin typeface="나눔고딕코딩"/>
-                <a:ea typeface="나눔고딕코딩"/>
-                <a:cs typeface="나눔고딕코딩"/>
+                <a:latin typeface="D2Coding"/>
+                <a:ea typeface="D2Coding"/>
+                <a:cs typeface="D2Coding"/>
               </a:rPr>
               <a:t>-- ⑤ 다른 테이블의 조회 결과를 삽입 (INSERT ... SELECT)</a:t>
             </a:r>
@@ -39870,9 +39870,9 @@
                 <a:solidFill>
                   <a:srgbClr val="E6EAF2"/>
                 </a:solidFill>
-                <a:latin typeface="나눔고딕코딩"/>
-                <a:ea typeface="나눔고딕코딩"/>
-                <a:cs typeface="나눔고딕코딩"/>
+                <a:latin typeface="D2Coding"/>
+                <a:ea typeface="D2Coding"/>
+                <a:cs typeface="D2Coding"/>
               </a:rPr>
               <a:t>CREATE TABLE vip_customers LIKE customers;</a:t>
             </a:r>
@@ -39888,9 +39888,9 @@
                 <a:solidFill>
                   <a:srgbClr val="E6EAF2"/>
                 </a:solidFill>
-                <a:latin typeface="나눔고딕코딩"/>
-                <a:ea typeface="나눔고딕코딩"/>
-                <a:cs typeface="나눔고딕코딩"/>
+                <a:latin typeface="D2Coding"/>
+                <a:ea typeface="D2Coding"/>
+                <a:cs typeface="D2Coding"/>
               </a:rPr>
               <a:t>INSERT INTO vip_customers</a:t>
             </a:r>
@@ -39906,9 +39906,9 @@
                 <a:solidFill>
                   <a:srgbClr val="E6EAF2"/>
                 </a:solidFill>
-                <a:latin typeface="나눔고딕코딩"/>
-                <a:ea typeface="나눔고딕코딩"/>
-                <a:cs typeface="나눔고딕코딩"/>
+                <a:latin typeface="D2Coding"/>
+                <a:ea typeface="D2Coding"/>
+                <a:cs typeface="D2Coding"/>
               </a:rPr>
               <a:t>SELECT * FROM customers WHERE grade = 'VIP';</a:t>
             </a:r>
@@ -45019,9 +45019,9 @@
                 <a:solidFill>
                   <a:srgbClr val="7A869C"/>
                 </a:solidFill>
-                <a:latin typeface="나눔고딕코딩"/>
-                <a:ea typeface="나눔고딕코딩"/>
-                <a:cs typeface="나눔고딕코딩"/>
+                <a:latin typeface="D2Coding"/>
+                <a:ea typeface="D2Coding"/>
+                <a:cs typeface="D2Coding"/>
               </a:rPr>
               <a:t>1</a:t>
             </a:r>
@@ -45037,9 +45037,9 @@
                 <a:solidFill>
                   <a:srgbClr val="7A869C"/>
                 </a:solidFill>
-                <a:latin typeface="나눔고딕코딩"/>
-                <a:ea typeface="나눔고딕코딩"/>
-                <a:cs typeface="나눔고딕코딩"/>
+                <a:latin typeface="D2Coding"/>
+                <a:ea typeface="D2Coding"/>
+                <a:cs typeface="D2Coding"/>
               </a:rPr>
               <a:t>2</a:t>
             </a:r>
@@ -45055,9 +45055,9 @@
                 <a:solidFill>
                   <a:srgbClr val="7A869C"/>
                 </a:solidFill>
-                <a:latin typeface="나눔고딕코딩"/>
-                <a:ea typeface="나눔고딕코딩"/>
-                <a:cs typeface="나눔고딕코딩"/>
+                <a:latin typeface="D2Coding"/>
+                <a:ea typeface="D2Coding"/>
+                <a:cs typeface="D2Coding"/>
               </a:rPr>
               <a:t>3</a:t>
             </a:r>
@@ -45073,9 +45073,9 @@
                 <a:solidFill>
                   <a:srgbClr val="7A869C"/>
                 </a:solidFill>
-                <a:latin typeface="나눔고딕코딩"/>
-                <a:ea typeface="나눔고딕코딩"/>
-                <a:cs typeface="나눔고딕코딩"/>
+                <a:latin typeface="D2Coding"/>
+                <a:ea typeface="D2Coding"/>
+                <a:cs typeface="D2Coding"/>
               </a:rPr>
               <a:t>4</a:t>
             </a:r>
@@ -45091,9 +45091,9 @@
                 <a:solidFill>
                   <a:srgbClr val="7A869C"/>
                 </a:solidFill>
-                <a:latin typeface="나눔고딕코딩"/>
-                <a:ea typeface="나눔고딕코딩"/>
-                <a:cs typeface="나눔고딕코딩"/>
+                <a:latin typeface="D2Coding"/>
+                <a:ea typeface="D2Coding"/>
+                <a:cs typeface="D2Coding"/>
               </a:rPr>
               <a:t>5</a:t>
             </a:r>
@@ -45109,9 +45109,9 @@
                 <a:solidFill>
                   <a:srgbClr val="7A869C"/>
                 </a:solidFill>
-                <a:latin typeface="나눔고딕코딩"/>
-                <a:ea typeface="나눔고딕코딩"/>
-                <a:cs typeface="나눔고딕코딩"/>
+                <a:latin typeface="D2Coding"/>
+                <a:ea typeface="D2Coding"/>
+                <a:cs typeface="D2Coding"/>
               </a:rPr>
               <a:t>6</a:t>
             </a:r>
@@ -45127,9 +45127,9 @@
                 <a:solidFill>
                   <a:srgbClr val="7A869C"/>
                 </a:solidFill>
-                <a:latin typeface="나눔고딕코딩"/>
-                <a:ea typeface="나눔고딕코딩"/>
-                <a:cs typeface="나눔고딕코딩"/>
+                <a:latin typeface="D2Coding"/>
+                <a:ea typeface="D2Coding"/>
+                <a:cs typeface="D2Coding"/>
               </a:rPr>
               <a:t>7</a:t>
             </a:r>
@@ -45145,9 +45145,9 @@
                 <a:solidFill>
                   <a:srgbClr val="7A869C"/>
                 </a:solidFill>
-                <a:latin typeface="나눔고딕코딩"/>
-                <a:ea typeface="나눔고딕코딩"/>
-                <a:cs typeface="나눔고딕코딩"/>
+                <a:latin typeface="D2Coding"/>
+                <a:ea typeface="D2Coding"/>
+                <a:cs typeface="D2Coding"/>
               </a:rPr>
               <a:t>8</a:t>
             </a:r>
@@ -45163,9 +45163,9 @@
                 <a:solidFill>
                   <a:srgbClr val="7A869C"/>
                 </a:solidFill>
-                <a:latin typeface="나눔고딕코딩"/>
-                <a:ea typeface="나눔고딕코딩"/>
-                <a:cs typeface="나눔고딕코딩"/>
+                <a:latin typeface="D2Coding"/>
+                <a:ea typeface="D2Coding"/>
+                <a:cs typeface="D2Coding"/>
               </a:rPr>
               <a:t>9</a:t>
             </a:r>
@@ -45181,9 +45181,9 @@
                 <a:solidFill>
                   <a:srgbClr val="7A869C"/>
                 </a:solidFill>
-                <a:latin typeface="나눔고딕코딩"/>
-                <a:ea typeface="나눔고딕코딩"/>
-                <a:cs typeface="나눔고딕코딩"/>
+                <a:latin typeface="D2Coding"/>
+                <a:ea typeface="D2Coding"/>
+                <a:cs typeface="D2Coding"/>
               </a:rPr>
               <a:t>10</a:t>
             </a:r>
@@ -45222,9 +45222,9 @@
                 <a:solidFill>
                   <a:srgbClr val="E6EAF2"/>
                 </a:solidFill>
-                <a:latin typeface="나눔고딕코딩"/>
-                <a:ea typeface="나눔고딕코딩"/>
-                <a:cs typeface="나눔고딕코딩"/>
+                <a:latin typeface="D2Coding"/>
+                <a:ea typeface="D2Coding"/>
+                <a:cs typeface="D2Coding"/>
               </a:rPr>
               <a:t>-- 값 순서: emp_id, name, dept, position, hire_date, salary(만원), manager_id</a:t>
             </a:r>
@@ -45240,9 +45240,9 @@
                 <a:solidFill>
                   <a:srgbClr val="E6EAF2"/>
                 </a:solidFill>
-                <a:latin typeface="나눔고딕코딩"/>
-                <a:ea typeface="나눔고딕코딩"/>
-                <a:cs typeface="나눔고딕코딩"/>
+                <a:latin typeface="D2Coding"/>
+                <a:ea typeface="D2Coding"/>
+                <a:cs typeface="D2Coding"/>
               </a:rPr>
               <a:t>INSERT INTO employees VALUES</a:t>
             </a:r>
@@ -45258,9 +45258,9 @@
                 <a:solidFill>
                   <a:srgbClr val="E6EAF2"/>
                 </a:solidFill>
-                <a:latin typeface="나눔고딕코딩"/>
-                <a:ea typeface="나눔고딕코딩"/>
-                <a:cs typeface="나눔고딕코딩"/>
+                <a:latin typeface="D2Coding"/>
+                <a:ea typeface="D2Coding"/>
+                <a:cs typeface="D2Coding"/>
               </a:rPr>
               <a:t> ('E001','김성호','영업팀','팀장','2018-03-05',520,NULL),</a:t>
             </a:r>
@@ -45276,9 +45276,9 @@
                 <a:solidFill>
                   <a:srgbClr val="E6EAF2"/>
                 </a:solidFill>
-                <a:latin typeface="나눔고딕코딩"/>
-                <a:ea typeface="나눔고딕코딩"/>
-                <a:cs typeface="나눔고딕코딩"/>
+                <a:latin typeface="D2Coding"/>
+                <a:ea typeface="D2Coding"/>
+                <a:cs typeface="D2Coding"/>
               </a:rPr>
               <a:t> ('E002','이지은','영업팀','대리','2021-07-01',380,'E001'),</a:t>
             </a:r>
@@ -45294,9 +45294,9 @@
                 <a:solidFill>
                   <a:srgbClr val="E6EAF2"/>
                 </a:solidFill>
-                <a:latin typeface="나눔고딕코딩"/>
-                <a:ea typeface="나눔고딕코딩"/>
-                <a:cs typeface="나눔고딕코딩"/>
+                <a:latin typeface="D2Coding"/>
+                <a:ea typeface="D2Coding"/>
+                <a:cs typeface="D2Coding"/>
               </a:rPr>
               <a:t> ('E003','박준영','영업팀','사원','2024-01-15',310,'E001'),</a:t>
             </a:r>
@@ -45312,9 +45312,9 @@
                 <a:solidFill>
                   <a:srgbClr val="E6EAF2"/>
                 </a:solidFill>
-                <a:latin typeface="나눔고딕코딩"/>
-                <a:ea typeface="나눔고딕코딩"/>
-                <a:cs typeface="나눔고딕코딩"/>
+                <a:latin typeface="D2Coding"/>
+                <a:ea typeface="D2Coding"/>
+                <a:cs typeface="D2Coding"/>
               </a:rPr>
               <a:t> ('E004','최민서','마케팅팀','팀장','2019-09-02',500,NULL),</a:t>
             </a:r>
@@ -45330,9 +45330,9 @@
                 <a:solidFill>
                   <a:srgbClr val="E6EAF2"/>
                 </a:solidFill>
-                <a:latin typeface="나눔고딕코딩"/>
-                <a:ea typeface="나눔고딕코딩"/>
-                <a:cs typeface="나눔고딕코딩"/>
+                <a:latin typeface="D2Coding"/>
+                <a:ea typeface="D2Coding"/>
+                <a:cs typeface="D2Coding"/>
               </a:rPr>
               <a:t> ('E005','정다은','마케팅팀','사원','2023-05-10',320,'E004'),</a:t>
             </a:r>
@@ -45348,9 +45348,9 @@
                 <a:solidFill>
                   <a:srgbClr val="E6EAF2"/>
                 </a:solidFill>
-                <a:latin typeface="나눔고딕코딩"/>
-                <a:ea typeface="나눔고딕코딩"/>
-                <a:cs typeface="나눔고딕코딩"/>
+                <a:latin typeface="D2Coding"/>
+                <a:ea typeface="D2Coding"/>
+                <a:cs typeface="D2Coding"/>
               </a:rPr>
               <a:t> ('E006','강태윤','물류팀','팀장','2020-02-17',480,NULL),</a:t>
             </a:r>
@@ -45366,9 +45366,9 @@
                 <a:solidFill>
                   <a:srgbClr val="E6EAF2"/>
                 </a:solidFill>
-                <a:latin typeface="나눔고딕코딩"/>
-                <a:ea typeface="나눔고딕코딩"/>
-                <a:cs typeface="나눔고딕코딩"/>
+                <a:latin typeface="D2Coding"/>
+                <a:ea typeface="D2Coding"/>
+                <a:cs typeface="D2Coding"/>
               </a:rPr>
               <a:t> ('E007','윤서준','물류팀','사원','2025-03-03',300,'E006'),</a:t>
             </a:r>
@@ -45384,9 +45384,9 @@
                 <a:solidFill>
                   <a:srgbClr val="E6EAF2"/>
                 </a:solidFill>
-                <a:latin typeface="나눔고딕코딩"/>
-                <a:ea typeface="나눔고딕코딩"/>
-                <a:cs typeface="나눔고딕코딩"/>
+                <a:latin typeface="D2Coding"/>
+                <a:ea typeface="D2Coding"/>
+                <a:cs typeface="D2Coding"/>
               </a:rPr>
               <a:t> ('E008','조하늘','경영지원팀','사원','2026-01-05',NULL,NULL);</a:t>
             </a:r>
@@ -45993,9 +45993,9 @@
                 <a:solidFill>
                   <a:srgbClr val="7A869C"/>
                 </a:solidFill>
-                <a:latin typeface="나눔고딕코딩"/>
-                <a:ea typeface="나눔고딕코딩"/>
-                <a:cs typeface="나눔고딕코딩"/>
+                <a:latin typeface="D2Coding"/>
+                <a:ea typeface="D2Coding"/>
+                <a:cs typeface="D2Coding"/>
               </a:rPr>
               <a:t>1</a:t>
             </a:r>
@@ -46011,9 +46011,9 @@
                 <a:solidFill>
                   <a:srgbClr val="7A869C"/>
                 </a:solidFill>
-                <a:latin typeface="나눔고딕코딩"/>
-                <a:ea typeface="나눔고딕코딩"/>
-                <a:cs typeface="나눔고딕코딩"/>
+                <a:latin typeface="D2Coding"/>
+                <a:ea typeface="D2Coding"/>
+                <a:cs typeface="D2Coding"/>
               </a:rPr>
               <a:t>2</a:t>
             </a:r>
@@ -46029,9 +46029,9 @@
                 <a:solidFill>
                   <a:srgbClr val="7A869C"/>
                 </a:solidFill>
-                <a:latin typeface="나눔고딕코딩"/>
-                <a:ea typeface="나눔고딕코딩"/>
-                <a:cs typeface="나눔고딕코딩"/>
+                <a:latin typeface="D2Coding"/>
+                <a:ea typeface="D2Coding"/>
+                <a:cs typeface="D2Coding"/>
               </a:rPr>
               <a:t>3</a:t>
             </a:r>
@@ -46047,9 +46047,9 @@
                 <a:solidFill>
                   <a:srgbClr val="7A869C"/>
                 </a:solidFill>
-                <a:latin typeface="나눔고딕코딩"/>
-                <a:ea typeface="나눔고딕코딩"/>
-                <a:cs typeface="나눔고딕코딩"/>
+                <a:latin typeface="D2Coding"/>
+                <a:ea typeface="D2Coding"/>
+                <a:cs typeface="D2Coding"/>
               </a:rPr>
               <a:t>4</a:t>
             </a:r>
@@ -46065,9 +46065,9 @@
                 <a:solidFill>
                   <a:srgbClr val="7A869C"/>
                 </a:solidFill>
-                <a:latin typeface="나눔고딕코딩"/>
-                <a:ea typeface="나눔고딕코딩"/>
-                <a:cs typeface="나눔고딕코딩"/>
+                <a:latin typeface="D2Coding"/>
+                <a:ea typeface="D2Coding"/>
+                <a:cs typeface="D2Coding"/>
               </a:rPr>
               <a:t>5</a:t>
             </a:r>
@@ -46083,9 +46083,9 @@
                 <a:solidFill>
                   <a:srgbClr val="7A869C"/>
                 </a:solidFill>
-                <a:latin typeface="나눔고딕코딩"/>
-                <a:ea typeface="나눔고딕코딩"/>
-                <a:cs typeface="나눔고딕코딩"/>
+                <a:latin typeface="D2Coding"/>
+                <a:ea typeface="D2Coding"/>
+                <a:cs typeface="D2Coding"/>
               </a:rPr>
               <a:t>6</a:t>
             </a:r>
@@ -46101,9 +46101,9 @@
                 <a:solidFill>
                   <a:srgbClr val="7A869C"/>
                 </a:solidFill>
-                <a:latin typeface="나눔고딕코딩"/>
-                <a:ea typeface="나눔고딕코딩"/>
-                <a:cs typeface="나눔고딕코딩"/>
+                <a:latin typeface="D2Coding"/>
+                <a:ea typeface="D2Coding"/>
+                <a:cs typeface="D2Coding"/>
               </a:rPr>
               <a:t>7</a:t>
             </a:r>
@@ -46119,9 +46119,9 @@
                 <a:solidFill>
                   <a:srgbClr val="7A869C"/>
                 </a:solidFill>
-                <a:latin typeface="나눔고딕코딩"/>
-                <a:ea typeface="나눔고딕코딩"/>
-                <a:cs typeface="나눔고딕코딩"/>
+                <a:latin typeface="D2Coding"/>
+                <a:ea typeface="D2Coding"/>
+                <a:cs typeface="D2Coding"/>
               </a:rPr>
               <a:t>8</a:t>
             </a:r>
@@ -46137,9 +46137,9 @@
                 <a:solidFill>
                   <a:srgbClr val="7A869C"/>
                 </a:solidFill>
-                <a:latin typeface="나눔고딕코딩"/>
-                <a:ea typeface="나눔고딕코딩"/>
-                <a:cs typeface="나눔고딕코딩"/>
+                <a:latin typeface="D2Coding"/>
+                <a:ea typeface="D2Coding"/>
+                <a:cs typeface="D2Coding"/>
               </a:rPr>
               <a:t>9</a:t>
             </a:r>
@@ -46155,9 +46155,9 @@
                 <a:solidFill>
                   <a:srgbClr val="7A869C"/>
                 </a:solidFill>
-                <a:latin typeface="나눔고딕코딩"/>
-                <a:ea typeface="나눔고딕코딩"/>
-                <a:cs typeface="나눔고딕코딩"/>
+                <a:latin typeface="D2Coding"/>
+                <a:ea typeface="D2Coding"/>
+                <a:cs typeface="D2Coding"/>
               </a:rPr>
               <a:t>10</a:t>
             </a:r>
@@ -46173,9 +46173,9 @@
                 <a:solidFill>
                   <a:srgbClr val="7A869C"/>
                 </a:solidFill>
-                <a:latin typeface="나눔고딕코딩"/>
-                <a:ea typeface="나눔고딕코딩"/>
-                <a:cs typeface="나눔고딕코딩"/>
+                <a:latin typeface="D2Coding"/>
+                <a:ea typeface="D2Coding"/>
+                <a:cs typeface="D2Coding"/>
               </a:rPr>
               <a:t>11</a:t>
             </a:r>
@@ -46191,9 +46191,9 @@
                 <a:solidFill>
                   <a:srgbClr val="7A869C"/>
                 </a:solidFill>
-                <a:latin typeface="나눔고딕코딩"/>
-                <a:ea typeface="나눔고딕코딩"/>
-                <a:cs typeface="나눔고딕코딩"/>
+                <a:latin typeface="D2Coding"/>
+                <a:ea typeface="D2Coding"/>
+                <a:cs typeface="D2Coding"/>
               </a:rPr>
               <a:t>12</a:t>
             </a:r>
@@ -46232,9 +46232,9 @@
                 <a:solidFill>
                   <a:srgbClr val="E6EAF2"/>
                 </a:solidFill>
-                <a:latin typeface="나눔고딕코딩"/>
-                <a:ea typeface="나눔고딕코딩"/>
-                <a:cs typeface="나눔고딕코딩"/>
+                <a:latin typeface="D2Coding"/>
+                <a:ea typeface="D2Coding"/>
+                <a:cs typeface="D2Coding"/>
               </a:rPr>
               <a:t>-- 값 순서: cust_id, name, grade, city, email, joined_date, points</a:t>
             </a:r>
@@ -46250,9 +46250,9 @@
                 <a:solidFill>
                   <a:srgbClr val="E6EAF2"/>
                 </a:solidFill>
-                <a:latin typeface="나눔고딕코딩"/>
-                <a:ea typeface="나눔고딕코딩"/>
-                <a:cs typeface="나눔고딕코딩"/>
+                <a:latin typeface="D2Coding"/>
+                <a:ea typeface="D2Coding"/>
+                <a:cs typeface="D2Coding"/>
               </a:rPr>
               <a:t>INSERT INTO customers VALUES</a:t>
             </a:r>
@@ -46268,9 +46268,9 @@
                 <a:solidFill>
                   <a:srgbClr val="E6EAF2"/>
                 </a:solidFill>
-                <a:latin typeface="나눔고딕코딩"/>
-                <a:ea typeface="나눔고딕코딩"/>
-                <a:cs typeface="나눔고딕코딩"/>
+                <a:latin typeface="D2Coding"/>
+                <a:ea typeface="D2Coding"/>
+                <a:cs typeface="D2Coding"/>
               </a:rPr>
               <a:t> ('C001','한가람','VIP','서울','garam@example.com','2024-03-12',4500),</a:t>
             </a:r>
@@ -46286,9 +46286,9 @@
                 <a:solidFill>
                   <a:srgbClr val="E6EAF2"/>
                 </a:solidFill>
-                <a:latin typeface="나눔고딕코딩"/>
-                <a:ea typeface="나눔고딕코딩"/>
-                <a:cs typeface="나눔고딕코딩"/>
+                <a:latin typeface="D2Coding"/>
+                <a:ea typeface="D2Coding"/>
+                <a:cs typeface="D2Coding"/>
               </a:rPr>
               <a:t> ('C002','오세영','GOLD','부산','seyoung@example.com','2024-06-20',2300),</a:t>
             </a:r>
@@ -46304,9 +46304,9 @@
                 <a:solidFill>
                   <a:srgbClr val="E6EAF2"/>
                 </a:solidFill>
-                <a:latin typeface="나눔고딕코딩"/>
-                <a:ea typeface="나눔고딕코딩"/>
-                <a:cs typeface="나눔고딕코딩"/>
+                <a:latin typeface="D2Coding"/>
+                <a:ea typeface="D2Coding"/>
+                <a:cs typeface="D2Coding"/>
               </a:rPr>
               <a:t> ('C003','김도현','SILVER','서울','dohyun@example.com','2025-01-08',800),</a:t>
             </a:r>
@@ -46322,9 +46322,9 @@
                 <a:solidFill>
                   <a:srgbClr val="E6EAF2"/>
                 </a:solidFill>
-                <a:latin typeface="나눔고딕코딩"/>
-                <a:ea typeface="나눔고딕코딩"/>
-                <a:cs typeface="나눔고딕코딩"/>
+                <a:latin typeface="D2Coding"/>
+                <a:ea typeface="D2Coding"/>
+                <a:cs typeface="D2Coding"/>
               </a:rPr>
               <a:t> ('C004','임수빈','VIP','대전','subin@example.com','2023-11-02',5200),</a:t>
             </a:r>
@@ -46340,9 +46340,9 @@
                 <a:solidFill>
                   <a:srgbClr val="E6EAF2"/>
                 </a:solidFill>
-                <a:latin typeface="나눔고딕코딩"/>
-                <a:ea typeface="나눔고딕코딩"/>
-                <a:cs typeface="나눔고딕코딩"/>
+                <a:latin typeface="D2Coding"/>
+                <a:ea typeface="D2Coding"/>
+                <a:cs typeface="D2Coding"/>
               </a:rPr>
               <a:t> ('C005','박서연','SILVER','광주',NULL,'2025-04-17',300),</a:t>
             </a:r>
@@ -46358,9 +46358,9 @@
                 <a:solidFill>
                   <a:srgbClr val="E6EAF2"/>
                 </a:solidFill>
-                <a:latin typeface="나눔고딕코딩"/>
-                <a:ea typeface="나눔고딕코딩"/>
-                <a:cs typeface="나눔고딕코딩"/>
+                <a:latin typeface="D2Coding"/>
+                <a:ea typeface="D2Coding"/>
+                <a:cs typeface="D2Coding"/>
               </a:rPr>
               <a:t> ('C006','장민혁','GOLD','서울','minhyuk@example.com','2024-09-30',1900),</a:t>
             </a:r>
@@ -46376,9 +46376,9 @@
                 <a:solidFill>
                   <a:srgbClr val="E6EAF2"/>
                 </a:solidFill>
-                <a:latin typeface="나눔고딕코딩"/>
-                <a:ea typeface="나눔고딕코딩"/>
-                <a:cs typeface="나눔고딕코딩"/>
+                <a:latin typeface="D2Coding"/>
+                <a:ea typeface="D2Coding"/>
+                <a:cs typeface="D2Coding"/>
               </a:rPr>
               <a:t> ('C007','문예린','SILVER',NULL,'yerin@example.com','2025-08-25',450),</a:t>
             </a:r>
@@ -46394,9 +46394,9 @@
                 <a:solidFill>
                   <a:srgbClr val="E6EAF2"/>
                 </a:solidFill>
-                <a:latin typeface="나눔고딕코딩"/>
-                <a:ea typeface="나눔고딕코딩"/>
-                <a:cs typeface="나눔고딕코딩"/>
+                <a:latin typeface="D2Coding"/>
+                <a:ea typeface="D2Coding"/>
+                <a:cs typeface="D2Coding"/>
               </a:rPr>
               <a:t> ('C008','신우진','SILVER','부산','woojin@example.com','2026-02-14',150),</a:t>
             </a:r>
@@ -46412,9 +46412,9 @@
                 <a:solidFill>
                   <a:srgbClr val="E6EAF2"/>
                 </a:solidFill>
-                <a:latin typeface="나눔고딕코딩"/>
-                <a:ea typeface="나눔고딕코딩"/>
-                <a:cs typeface="나눔고딕코딩"/>
+                <a:latin typeface="D2Coding"/>
+                <a:ea typeface="D2Coding"/>
+                <a:cs typeface="D2Coding"/>
               </a:rPr>
               <a:t> ('C009','배소율','GOLD','인천','soyul@example.com','2025-06-11',2100),</a:t>
             </a:r>
@@ -46430,9 +46430,9 @@
                 <a:solidFill>
                   <a:srgbClr val="E6EAF2"/>
                 </a:solidFill>
-                <a:latin typeface="나눔고딕코딩"/>
-                <a:ea typeface="나눔고딕코딩"/>
-                <a:cs typeface="나눔고딕코딩"/>
+                <a:latin typeface="D2Coding"/>
+                <a:ea typeface="D2Coding"/>
+                <a:cs typeface="D2Coding"/>
               </a:rPr>
               <a:t> ('C010','서지안','SILVER','대전','jian@example.com','2026-03-01',0);</a:t>
             </a:r>
